--- a/exports/pptx/lessons/middle-module-05-dot-addition/day-08-project-session-1.pptx
+++ b/exports/pptx/lessons/middle-module-05-dot-addition/day-08-project-session-1.pptx
@@ -16,9 +16,12 @@
     <p:sldId id="264" r:id="rId10"/>
     <p:sldId id="265" r:id="rId11"/>
     <p:sldId id="266" r:id="rId12"/>
+    <p:sldId id="267" r:id="rId13"/>
+    <p:sldId id="268" r:id="rId14"/>
+    <p:sldId id="269" r:id="rId15"/>
   </p:sldIdLst>
   <p:notesMasterIdLst>
-    <p:notesMasterId r:id="rId13"/>
+    <p:notesMasterId r:id="rId16"/>
   </p:notesMasterIdLst>
   <p:sldSz cx="9144000" cy="5143500"/>
   <p:notesSz cx="5143500" cy="9144000"/>
@@ -712,6 +715,270 @@
             <a:fld id="{F7021451-1387-4CA6-816F-3879F97B5CBC}" type="slidenum">
               <a:rPr lang="en-US"/>
               <a:t>11</a:t>
+            </a:fld>
+            <a:endParaRPr lang="en-US"/>
+          </a:p>
+        </p:txBody>
+      </p:sp>
+    </p:spTree>
+    <p:extLst>
+      <p:ext uri="{BB962C8B-B14F-4D97-AF65-F5344CB8AC3E}">
+        <p14:creationId xmlns:p14="http://schemas.microsoft.com/office/powerpoint/2010/main" val="1024086991"/>
+      </p:ext>
+    </p:extLst>
+  </p:cSld>
+  <p:clrMapOvr>
+    <a:masterClrMapping/>
+  </p:clrMapOvr>
+</p:notes>
+</file>
+
+<file path=ppt/notesSlides/notesSlide12.xml><?xml version="1.0" encoding="utf-8"?>
+<p:notes xmlns:a="http://schemas.openxmlformats.org/drawingml/2006/main" xmlns:r="http://schemas.openxmlformats.org/officeDocument/2006/relationships" xmlns:p="http://schemas.openxmlformats.org/presentationml/2006/main">
+  <p:cSld>
+    <p:spTree>
+      <p:nvGrpSpPr>
+        <p:cNvPr id="1" name=""/>
+        <p:cNvGrpSpPr/>
+        <p:nvPr/>
+      </p:nvGrpSpPr>
+      <p:grpSpPr>
+        <a:xfrm>
+          <a:off x="0" y="0"/>
+          <a:ext cx="0" cy="0"/>
+          <a:chOff x="0" y="0"/>
+          <a:chExt cx="0" cy="0"/>
+        </a:xfrm>
+      </p:grpSpPr>
+      <p:sp>
+        <p:nvSpPr>
+          <p:cNvPr id="2" name="Slide Image Placeholder 1"/>
+          <p:cNvSpPr>
+            <a:spLocks noGrp="1" noRot="1" noChangeAspect="1"/>
+          </p:cNvSpPr>
+          <p:nvPr>
+            <p:ph type="sldImg"/>
+          </p:nvPr>
+        </p:nvSpPr>
+        <p:spPr/>
+      </p:sp>
+      <p:sp>
+        <p:nvSpPr>
+          <p:cNvPr id="3" name="Notes Placeholder 2"/>
+          <p:cNvSpPr>
+            <a:spLocks noGrp="1"/>
+          </p:cNvSpPr>
+          <p:nvPr>
+            <p:ph type="body" idx="1"/>
+          </p:nvPr>
+        </p:nvSpPr>
+        <p:spPr/>
+        <p:txBody>
+          <a:bodyPr/>
+          <a:lstStyle/>
+          <a:p>
+            <a:r>
+              <a:rPr lang="en-US" dirty="0"/>
+              <a:t/>
+            </a:r>
+            <a:endParaRPr lang="en-US" dirty="0"/>
+          </a:p>
+        </p:txBody>
+      </p:sp>
+      <p:sp>
+        <p:nvSpPr>
+          <p:cNvPr id="4" name="Slide Number Placeholder 3"/>
+          <p:cNvSpPr>
+            <a:spLocks noGrp="1"/>
+          </p:cNvSpPr>
+          <p:nvPr>
+            <p:ph type="sldNum" sz="quarter" idx="10"/>
+          </p:nvPr>
+        </p:nvSpPr>
+        <p:spPr/>
+        <p:txBody>
+          <a:bodyPr/>
+          <a:lstStyle/>
+          <a:p>
+            <a:fld id="{F7021451-1387-4CA6-816F-3879F97B5CBC}" type="slidenum">
+              <a:rPr lang="en-US"/>
+              <a:t>12</a:t>
+            </a:fld>
+            <a:endParaRPr lang="en-US"/>
+          </a:p>
+        </p:txBody>
+      </p:sp>
+    </p:spTree>
+    <p:extLst>
+      <p:ext uri="{BB962C8B-B14F-4D97-AF65-F5344CB8AC3E}">
+        <p14:creationId xmlns:p14="http://schemas.microsoft.com/office/powerpoint/2010/main" val="1024086991"/>
+      </p:ext>
+    </p:extLst>
+  </p:cSld>
+  <p:clrMapOvr>
+    <a:masterClrMapping/>
+  </p:clrMapOvr>
+</p:notes>
+</file>
+
+<file path=ppt/notesSlides/notesSlide13.xml><?xml version="1.0" encoding="utf-8"?>
+<p:notes xmlns:a="http://schemas.openxmlformats.org/drawingml/2006/main" xmlns:r="http://schemas.openxmlformats.org/officeDocument/2006/relationships" xmlns:p="http://schemas.openxmlformats.org/presentationml/2006/main">
+  <p:cSld>
+    <p:spTree>
+      <p:nvGrpSpPr>
+        <p:cNvPr id="1" name=""/>
+        <p:cNvGrpSpPr/>
+        <p:nvPr/>
+      </p:nvGrpSpPr>
+      <p:grpSpPr>
+        <a:xfrm>
+          <a:off x="0" y="0"/>
+          <a:ext cx="0" cy="0"/>
+          <a:chOff x="0" y="0"/>
+          <a:chExt cx="0" cy="0"/>
+        </a:xfrm>
+      </p:grpSpPr>
+      <p:sp>
+        <p:nvSpPr>
+          <p:cNvPr id="2" name="Slide Image Placeholder 1"/>
+          <p:cNvSpPr>
+            <a:spLocks noGrp="1" noRot="1" noChangeAspect="1"/>
+          </p:cNvSpPr>
+          <p:nvPr>
+            <p:ph type="sldImg"/>
+          </p:nvPr>
+        </p:nvSpPr>
+        <p:spPr/>
+      </p:sp>
+      <p:sp>
+        <p:nvSpPr>
+          <p:cNvPr id="3" name="Notes Placeholder 2"/>
+          <p:cNvSpPr>
+            <a:spLocks noGrp="1"/>
+          </p:cNvSpPr>
+          <p:nvPr>
+            <p:ph type="body" idx="1"/>
+          </p:nvPr>
+        </p:nvSpPr>
+        <p:spPr/>
+        <p:txBody>
+          <a:bodyPr/>
+          <a:lstStyle/>
+          <a:p>
+            <a:r>
+              <a:rPr lang="en-US" dirty="0"/>
+              <a:t/>
+            </a:r>
+            <a:endParaRPr lang="en-US" dirty="0"/>
+          </a:p>
+        </p:txBody>
+      </p:sp>
+      <p:sp>
+        <p:nvSpPr>
+          <p:cNvPr id="4" name="Slide Number Placeholder 3"/>
+          <p:cNvSpPr>
+            <a:spLocks noGrp="1"/>
+          </p:cNvSpPr>
+          <p:nvPr>
+            <p:ph type="sldNum" sz="quarter" idx="10"/>
+          </p:nvPr>
+        </p:nvSpPr>
+        <p:spPr/>
+        <p:txBody>
+          <a:bodyPr/>
+          <a:lstStyle/>
+          <a:p>
+            <a:fld id="{F7021451-1387-4CA6-816F-3879F97B5CBC}" type="slidenum">
+              <a:rPr lang="en-US"/>
+              <a:t>13</a:t>
+            </a:fld>
+            <a:endParaRPr lang="en-US"/>
+          </a:p>
+        </p:txBody>
+      </p:sp>
+    </p:spTree>
+    <p:extLst>
+      <p:ext uri="{BB962C8B-B14F-4D97-AF65-F5344CB8AC3E}">
+        <p14:creationId xmlns:p14="http://schemas.microsoft.com/office/powerpoint/2010/main" val="1024086991"/>
+      </p:ext>
+    </p:extLst>
+  </p:cSld>
+  <p:clrMapOvr>
+    <a:masterClrMapping/>
+  </p:clrMapOvr>
+</p:notes>
+</file>
+
+<file path=ppt/notesSlides/notesSlide14.xml><?xml version="1.0" encoding="utf-8"?>
+<p:notes xmlns:a="http://schemas.openxmlformats.org/drawingml/2006/main" xmlns:r="http://schemas.openxmlformats.org/officeDocument/2006/relationships" xmlns:p="http://schemas.openxmlformats.org/presentationml/2006/main">
+  <p:cSld>
+    <p:spTree>
+      <p:nvGrpSpPr>
+        <p:cNvPr id="1" name=""/>
+        <p:cNvGrpSpPr/>
+        <p:nvPr/>
+      </p:nvGrpSpPr>
+      <p:grpSpPr>
+        <a:xfrm>
+          <a:off x="0" y="0"/>
+          <a:ext cx="0" cy="0"/>
+          <a:chOff x="0" y="0"/>
+          <a:chExt cx="0" cy="0"/>
+        </a:xfrm>
+      </p:grpSpPr>
+      <p:sp>
+        <p:nvSpPr>
+          <p:cNvPr id="2" name="Slide Image Placeholder 1"/>
+          <p:cNvSpPr>
+            <a:spLocks noGrp="1" noRot="1" noChangeAspect="1"/>
+          </p:cNvSpPr>
+          <p:nvPr>
+            <p:ph type="sldImg"/>
+          </p:nvPr>
+        </p:nvSpPr>
+        <p:spPr/>
+      </p:sp>
+      <p:sp>
+        <p:nvSpPr>
+          <p:cNvPr id="3" name="Notes Placeholder 2"/>
+          <p:cNvSpPr>
+            <a:spLocks noGrp="1"/>
+          </p:cNvSpPr>
+          <p:nvPr>
+            <p:ph type="body" idx="1"/>
+          </p:nvPr>
+        </p:nvSpPr>
+        <p:spPr/>
+        <p:txBody>
+          <a:bodyPr/>
+          <a:lstStyle/>
+          <a:p>
+            <a:r>
+              <a:rPr lang="en-US" dirty="0"/>
+              <a:t/>
+            </a:r>
+            <a:endParaRPr lang="en-US" dirty="0"/>
+          </a:p>
+        </p:txBody>
+      </p:sp>
+      <p:sp>
+        <p:nvSpPr>
+          <p:cNvPr id="4" name="Slide Number Placeholder 3"/>
+          <p:cNvSpPr>
+            <a:spLocks noGrp="1"/>
+          </p:cNvSpPr>
+          <p:nvPr>
+            <p:ph type="sldNum" sz="quarter" idx="10"/>
+          </p:nvPr>
+        </p:nvSpPr>
+        <p:spPr/>
+        <p:txBody>
+          <a:bodyPr/>
+          <a:lstStyle/>
+          <a:p>
+            <a:fld id="{F7021451-1387-4CA6-816F-3879F97B5CBC}" type="slidenum">
+              <a:rPr lang="en-US"/>
+              <a:t>14</a:t>
             </a:fld>
             <a:endParaRPr lang="en-US"/>
           </a:p>
@@ -2011,102 +2278,6 @@
         </p:nvSpPr>
         <p:spPr>
           <a:xfrm>
-            <a:off x="406301" y="1223963"/>
-            <a:ext cx="8498026" cy="274290"/>
-          </a:xfrm>
-          <a:prstGeom prst="rect">
-            <a:avLst/>
-          </a:prstGeom>
-          <a:noFill/>
-          <a:ln/>
-        </p:spPr>
-        <p:txBody>
-          <a:bodyPr wrap="square" lIns="0" tIns="0" rIns="0" bIns="0" rtlCol="0" anchor="t"/>
-          <a:lstStyle/>
-          <a:p>
-            <a:pPr algn="l" indent="0" marL="0">
-              <a:lnSpc>
-                <a:spcPts val="2160"/>
-              </a:lnSpc>
-              <a:spcBef>
-                <a:spcPts val="600"/>
-              </a:spcBef>
-              <a:spcAft>
-                <a:spcPts val="800"/>
-              </a:spcAft>
-              <a:buNone/>
-            </a:pPr>
-            <a:r>
-              <a:rPr lang="en-US" sz="1800" b="1" dirty="0">
-                <a:solidFill>
-                  <a:srgbClr val="FE4447"/>
-                </a:solidFill>
-                <a:latin typeface="Georgia" pitchFamily="34" charset="0"/>
-                <a:ea typeface="Georgia" pitchFamily="34" charset="-122"/>
-                <a:cs typeface="Georgia" pitchFamily="34" charset="-120"/>
-              </a:rPr>
-              <a:t>Learning objective</a:t>
-            </a:r>
-            <a:endParaRPr lang="en-US" sz="1800" dirty="0"/>
-          </a:p>
-        </p:txBody>
-      </p:sp>
-      <p:sp>
-        <p:nvSpPr>
-          <p:cNvPr id="6" name="Text 4"/>
-          <p:cNvSpPr/>
-          <p:nvPr/>
-        </p:nvSpPr>
-        <p:spPr>
-          <a:xfrm>
-            <a:off x="406301" y="1637854"/>
-            <a:ext cx="8498026" cy="426541"/>
-          </a:xfrm>
-          <a:prstGeom prst="rect">
-            <a:avLst/>
-          </a:prstGeom>
-          <a:noFill/>
-          <a:ln/>
-        </p:spPr>
-        <p:txBody>
-          <a:bodyPr wrap="square" lIns="0" tIns="0" rIns="0" bIns="0" rtlCol="0" anchor="t"/>
-          <a:lstStyle/>
-          <a:p>
-            <a:pPr algn="l" indent="0" marL="0">
-              <a:lnSpc>
-                <a:spcPts val="1680"/>
-              </a:lnSpc>
-              <a:spcBef>
-                <a:spcPts val="300"/>
-              </a:spcBef>
-              <a:spcAft>
-                <a:spcPts val="300"/>
-              </a:spcAft>
-              <a:buNone/>
-            </a:pPr>
-            <a:r>
-              <a:rPr lang="en-US" sz="1200" dirty="0">
-                <a:solidFill>
-                  <a:srgbClr val="1C2833"/>
-                </a:solidFill>
-                <a:latin typeface="Arial" pitchFamily="34" charset="0"/>
-                <a:ea typeface="Arial" pitchFamily="34" charset="-122"/>
-                <a:cs typeface="Arial" pitchFamily="34" charset="-120"/>
-              </a:rPr>
-              <a:t>By the end of this lesson, every pair will have a written project plan and at least one tangible artefact (script outline, first 5 workbook problems drafted, or first 3 data points collected) for their final project.</a:t>
-            </a:r>
-            <a:endParaRPr lang="en-US" sz="1200" dirty="0"/>
-          </a:p>
-        </p:txBody>
-      </p:sp>
-      <p:sp>
-        <p:nvSpPr>
-          <p:cNvPr id="7" name="Text 5"/>
-          <p:cNvSpPr/>
-          <p:nvPr/>
-        </p:nvSpPr>
-        <p:spPr>
-          <a:xfrm>
             <a:off x="406301" y="4434929"/>
             <a:ext cx="8498026" cy="213271"/>
           </a:xfrm>
@@ -2251,7 +2422,7 @@
                 <a:ea typeface="Georgia" pitchFamily="34" charset="-122"/>
                 <a:cs typeface="Georgia" pitchFamily="34" charset="-120"/>
               </a:rPr>
-              <a:t>Teacher notes</a:t>
+              <a:t>Student-facing content</a:t>
             </a:r>
             <a:endParaRPr lang="en-US" sz="1800" dirty="0"/>
           </a:p>
@@ -2265,13 +2436,66 @@
         </p:nvSpPr>
         <p:spPr>
           <a:xfrm>
-            <a:off x="406301" y="870942"/>
-            <a:ext cx="8498026" cy="853083"/>
-          </a:xfrm>
-          <a:prstGeom prst="rect">
+            <a:off x="406301" y="883593"/>
+            <a:ext cx="8331398" cy="3226594"/>
+          </a:xfrm>
+          <a:prstGeom prst="rect">
+            <a:avLst/>
+          </a:prstGeom>
+          <a:solidFill>
+            <a:srgbClr val="F4F8F9"/>
+          </a:solidFill>
+          <a:ln/>
+        </p:spPr>
+        <p:txBody>
+          <a:bodyPr wrap="square" rtlCol="0" anchor="ctr"/>
+          <a:lstStyle/>
+          <a:p>
+            <a:pPr indent="0" marL="0">
+              <a:buNone/>
+            </a:pPr>
+            <a:endParaRPr lang="en-US" dirty="0"/>
+          </a:p>
+        </p:txBody>
+      </p:sp>
+      <p:sp>
+        <p:nvSpPr>
+          <p:cNvPr id="5" name="Shape 3"/>
+          <p:cNvSpPr/>
+          <p:nvPr/>
+        </p:nvSpPr>
+        <p:spPr>
+          <a:xfrm>
+            <a:off x="434876" y="883593"/>
+            <a:ext cx="0" cy="3226594"/>
+          </a:xfrm>
+          <a:prstGeom prst="line">
             <a:avLst/>
           </a:prstGeom>
           <a:noFill/>
+          <a:ln w="57150">
+            <a:solidFill>
+              <a:srgbClr val="FE4447"/>
+            </a:solidFill>
+            <a:prstDash val="solid"/>
+          </a:ln>
+        </p:spPr>
+      </p:sp>
+      <p:sp>
+        <p:nvSpPr>
+          <p:cNvPr id="6" name="Text 4"/>
+          <p:cNvSpPr/>
+          <p:nvPr/>
+        </p:nvSpPr>
+        <p:spPr>
+          <a:xfrm>
+            <a:off x="692051" y="1074093"/>
+            <a:ext cx="7973389" cy="230981"/>
+          </a:xfrm>
+          <a:prstGeom prst="rect">
+            <a:avLst/>
+          </a:prstGeom>
+          <a:noFill/>
           <a:ln/>
         </p:spPr>
         <p:txBody>
@@ -2280,7 +2504,7 @@
           <a:p>
             <a:pPr algn="l" indent="0" marL="0">
               <a:lnSpc>
-                <a:spcPts val="1680"/>
+                <a:spcPts val="1820"/>
               </a:lnSpc>
               <a:spcBef>
                 <a:spcPts val="300"/>
@@ -2291,19 +2515,44 @@
               <a:buNone/>
             </a:pPr>
             <a:r>
-              <a:rPr lang="en-US" sz="1200" dirty="0">
-                <a:solidFill>
-                  <a:srgbClr val="1C2833"/>
-                </a:solidFill>
-                <a:latin typeface="Arial" pitchFamily="34" charset="0"/>
-                <a:ea typeface="Arial" pitchFamily="34" charset="-122"/>
-                <a:cs typeface="Arial" pitchFamily="34" charset="-120"/>
-              </a:rPr>
-              <a:t>– For video projects: students often shoot poor-quality video at home. Encourage them to rehearse and shoot in one or two takes — the </a:t>
-            </a:r>
+              <a:rPr lang="en-US" sz="1300" b="1" i="1" dirty="0">
+                <a:solidFill>
+                  <a:srgbClr val="1C2833"/>
+                </a:solidFill>
+                <a:latin typeface="Georgia" pitchFamily="34" charset="0"/>
+                <a:ea typeface="Georgia" pitchFamily="34" charset="-122"/>
+                <a:cs typeface="Georgia" pitchFamily="34" charset="-120"/>
+              </a:rPr>
+              <a:t>Project workshop — Session 1</a:t>
+            </a:r>
+            <a:endParaRPr lang="en-US" sz="1300" dirty="0"/>
+          </a:p>
+        </p:txBody>
+      </p:sp>
+      <p:sp>
+        <p:nvSpPr>
+          <p:cNvPr id="7" name="Text 5"/>
+          <p:cNvSpPr/>
+          <p:nvPr/>
+        </p:nvSpPr>
+        <p:spPr>
+          <a:xfrm>
+            <a:off x="692051" y="1343174"/>
+            <a:ext cx="7973389" cy="230981"/>
+          </a:xfrm>
+          <a:prstGeom prst="rect">
+            <a:avLst/>
+          </a:prstGeom>
+          <a:noFill/>
+          <a:ln/>
+        </p:spPr>
+        <p:txBody>
+          <a:bodyPr wrap="square" lIns="0" tIns="0" rIns="0" bIns="0" rtlCol="0" anchor="t"/>
+          <a:lstStyle/>
+          <a:p>
             <a:pPr algn="l" indent="0" marL="0">
               <a:lnSpc>
-                <a:spcPts val="1680"/>
+                <a:spcPts val="1820"/>
               </a:lnSpc>
               <a:spcBef>
                 <a:spcPts val="300"/>
@@ -2314,19 +2563,44 @@
               <a:buNone/>
             </a:pPr>
             <a:r>
-              <a:rPr lang="en-US" sz="1200" i="1" dirty="0">
-                <a:solidFill>
-                  <a:srgbClr val="1C2833"/>
-                </a:solidFill>
-                <a:latin typeface="Arial" pitchFamily="34" charset="0"/>
-                <a:ea typeface="Arial" pitchFamily="34" charset="-122"/>
-                <a:cs typeface="Arial" pitchFamily="34" charset="-120"/>
-              </a:rPr>
-              <a:t>teaching content</a:t>
-            </a:r>
+              <a:rPr lang="en-US" sz="1300" i="1" dirty="0">
+                <a:solidFill>
+                  <a:srgbClr val="1C2833"/>
+                </a:solidFill>
+                <a:latin typeface="Georgia" pitchFamily="34" charset="0"/>
+                <a:ea typeface="Georgia" pitchFamily="34" charset="-122"/>
+                <a:cs typeface="Georgia" pitchFamily="34" charset="-120"/>
+              </a:rPr>
+              <a:t>By end of class, your pair should have:</a:t>
+            </a:r>
+            <a:endParaRPr lang="en-US" sz="1300" dirty="0"/>
+          </a:p>
+        </p:txBody>
+      </p:sp>
+      <p:sp>
+        <p:nvSpPr>
+          <p:cNvPr id="8" name="Text 6"/>
+          <p:cNvSpPr/>
+          <p:nvPr/>
+        </p:nvSpPr>
+        <p:spPr>
+          <a:xfrm>
+            <a:off x="692051" y="1612255"/>
+            <a:ext cx="7973389" cy="230981"/>
+          </a:xfrm>
+          <a:prstGeom prst="rect">
+            <a:avLst/>
+          </a:prstGeom>
+          <a:noFill/>
+          <a:ln/>
+        </p:spPr>
+        <p:txBody>
+          <a:bodyPr wrap="square" lIns="0" tIns="0" rIns="0" bIns="0" rtlCol="0" anchor="t"/>
+          <a:lstStyle/>
+          <a:p>
             <a:pPr algn="l" indent="0" marL="0">
               <a:lnSpc>
-                <a:spcPts val="1680"/>
+                <a:spcPts val="1820"/>
               </a:lnSpc>
               <a:spcBef>
                 <a:spcPts val="300"/>
@@ -2337,23 +2611,311 @@
               <a:buNone/>
             </a:pPr>
             <a:r>
-              <a:rPr lang="en-US" sz="1200" dirty="0">
-                <a:solidFill>
-                  <a:srgbClr val="1C2833"/>
-                </a:solidFill>
-                <a:latin typeface="Arial" pitchFamily="34" charset="0"/>
-                <a:ea typeface="Arial" pitchFamily="34" charset="-122"/>
-                <a:cs typeface="Arial" pitchFamily="34" charset="-120"/>
-              </a:rPr>
-              <a:t> matters more than production value. – For data projects: be wary of small-sample misinterpretation. If a pair has only 3 data points and one shows the dot method is slower, that's a real finding — let them report it. Statistical thinking is part of the project.</a:t>
-            </a:r>
-            <a:endParaRPr lang="en-US" sz="1200" dirty="0"/>
-          </a:p>
-        </p:txBody>
-      </p:sp>
-      <p:sp>
-        <p:nvSpPr>
-          <p:cNvPr id="5" name="Text 3"/>
+              <a:rPr lang="en-US" sz="1300" i="1" dirty="0">
+                <a:solidFill>
+                  <a:srgbClr val="1C2833"/>
+                </a:solidFill>
+                <a:latin typeface="Georgia" pitchFamily="34" charset="0"/>
+                <a:ea typeface="Georgia" pitchFamily="34" charset="-122"/>
+                <a:cs typeface="Georgia" pitchFamily="34" charset="-120"/>
+              </a:rPr>
+              <a:t>A written project plan paragraph.</a:t>
+            </a:r>
+            <a:endParaRPr lang="en-US" sz="1300" dirty="0"/>
+          </a:p>
+        </p:txBody>
+      </p:sp>
+      <p:sp>
+        <p:nvSpPr>
+          <p:cNvPr id="9" name="Text 7"/>
+          <p:cNvSpPr/>
+          <p:nvPr/>
+        </p:nvSpPr>
+        <p:spPr>
+          <a:xfrm>
+            <a:off x="692051" y="1881336"/>
+            <a:ext cx="7973389" cy="230981"/>
+          </a:xfrm>
+          <a:prstGeom prst="rect">
+            <a:avLst/>
+          </a:prstGeom>
+          <a:noFill/>
+          <a:ln/>
+        </p:spPr>
+        <p:txBody>
+          <a:bodyPr wrap="square" lIns="0" tIns="0" rIns="0" bIns="0" rtlCol="0" anchor="t"/>
+          <a:lstStyle/>
+          <a:p>
+            <a:pPr algn="l" indent="0" marL="0">
+              <a:lnSpc>
+                <a:spcPts val="1820"/>
+              </a:lnSpc>
+              <a:spcBef>
+                <a:spcPts val="300"/>
+              </a:spcBef>
+              <a:spcAft>
+                <a:spcPts val="300"/>
+              </a:spcAft>
+              <a:buNone/>
+            </a:pPr>
+            <a:r>
+              <a:rPr lang="en-US" sz="1300" i="1" dirty="0">
+                <a:solidFill>
+                  <a:srgbClr val="1C2833"/>
+                </a:solidFill>
+                <a:latin typeface="Georgia" pitchFamily="34" charset="0"/>
+                <a:ea typeface="Georgia" pitchFamily="34" charset="-122"/>
+                <a:cs typeface="Georgia" pitchFamily="34" charset="-120"/>
+              </a:rPr>
+              <a:t>The start of your artefact: a script draft, 5 worked problems, OR 3 data points.</a:t>
+            </a:r>
+            <a:endParaRPr lang="en-US" sz="1300" dirty="0"/>
+          </a:p>
+        </p:txBody>
+      </p:sp>
+      <p:sp>
+        <p:nvSpPr>
+          <p:cNvPr id="10" name="Text 8"/>
+          <p:cNvSpPr/>
+          <p:nvPr/>
+        </p:nvSpPr>
+        <p:spPr>
+          <a:xfrm>
+            <a:off x="692051" y="2150418"/>
+            <a:ext cx="7973389" cy="230981"/>
+          </a:xfrm>
+          <a:prstGeom prst="rect">
+            <a:avLst/>
+          </a:prstGeom>
+          <a:noFill/>
+          <a:ln/>
+        </p:spPr>
+        <p:txBody>
+          <a:bodyPr wrap="square" lIns="0" tIns="0" rIns="0" bIns="0" rtlCol="0" anchor="t"/>
+          <a:lstStyle/>
+          <a:p>
+            <a:pPr algn="l" indent="0" marL="0">
+              <a:lnSpc>
+                <a:spcPts val="1820"/>
+              </a:lnSpc>
+              <a:spcBef>
+                <a:spcPts val="300"/>
+              </a:spcBef>
+              <a:spcAft>
+                <a:spcPts val="300"/>
+              </a:spcAft>
+              <a:buNone/>
+            </a:pPr>
+            <a:r>
+              <a:rPr lang="en-US" sz="1300" i="1" dirty="0">
+                <a:solidFill>
+                  <a:srgbClr val="1C2833"/>
+                </a:solidFill>
+                <a:latin typeface="Georgia" pitchFamily="34" charset="0"/>
+                <a:ea typeface="Georgia" pitchFamily="34" charset="-122"/>
+                <a:cs typeface="Georgia" pitchFamily="34" charset="-120"/>
+              </a:rPr>
+              <a:t>Plan template:</a:t>
+            </a:r>
+            <a:endParaRPr lang="en-US" sz="1300" dirty="0"/>
+          </a:p>
+        </p:txBody>
+      </p:sp>
+      <p:sp>
+        <p:nvSpPr>
+          <p:cNvPr id="11" name="Text 9"/>
+          <p:cNvSpPr/>
+          <p:nvPr/>
+        </p:nvSpPr>
+        <p:spPr>
+          <a:xfrm>
+            <a:off x="692051" y="2419499"/>
+            <a:ext cx="7973389" cy="461963"/>
+          </a:xfrm>
+          <a:prstGeom prst="rect">
+            <a:avLst/>
+          </a:prstGeom>
+          <a:noFill/>
+          <a:ln/>
+        </p:spPr>
+        <p:txBody>
+          <a:bodyPr wrap="square" lIns="0" tIns="0" rIns="0" bIns="0" rtlCol="0" anchor="t"/>
+          <a:lstStyle/>
+          <a:p>
+            <a:pPr algn="l" indent="0" marL="0">
+              <a:lnSpc>
+                <a:spcPts val="1820"/>
+              </a:lnSpc>
+              <a:spcBef>
+                <a:spcPts val="300"/>
+              </a:spcBef>
+              <a:spcAft>
+                <a:spcPts val="300"/>
+              </a:spcAft>
+              <a:buNone/>
+            </a:pPr>
+            <a:r>
+              <a:rPr lang="en-US" sz="1300" i="1" dirty="0">
+                <a:solidFill>
+                  <a:srgbClr val="1C2833"/>
+                </a:solidFill>
+                <a:latin typeface="Georgia" pitchFamily="34" charset="0"/>
+                <a:ea typeface="Georgia" pitchFamily="34" charset="-122"/>
+                <a:cs typeface="Georgia" pitchFamily="34" charset="-120"/>
+              </a:rPr>
+              <a:t>``` Format: __________ (video / workbook / data project) Audience walks away thinking: __________ Structure (3 parts):</a:t>
+            </a:r>
+            <a:endParaRPr lang="en-US" sz="1300" dirty="0"/>
+          </a:p>
+        </p:txBody>
+      </p:sp>
+      <p:sp>
+        <p:nvSpPr>
+          <p:cNvPr id="12" name="Text 10"/>
+          <p:cNvSpPr/>
+          <p:nvPr/>
+        </p:nvSpPr>
+        <p:spPr>
+          <a:xfrm>
+            <a:off x="692051" y="2919561"/>
+            <a:ext cx="7973389" cy="230981"/>
+          </a:xfrm>
+          <a:prstGeom prst="rect">
+            <a:avLst/>
+          </a:prstGeom>
+          <a:noFill/>
+          <a:ln/>
+        </p:spPr>
+        <p:txBody>
+          <a:bodyPr wrap="square" lIns="0" tIns="0" rIns="0" bIns="0" rtlCol="0" anchor="t"/>
+          <a:lstStyle/>
+          <a:p>
+            <a:pPr algn="l" indent="0" marL="0">
+              <a:lnSpc>
+                <a:spcPts val="1820"/>
+              </a:lnSpc>
+              <a:spcBef>
+                <a:spcPts val="300"/>
+              </a:spcBef>
+              <a:spcAft>
+                <a:spcPts val="300"/>
+              </a:spcAft>
+              <a:buNone/>
+            </a:pPr>
+            <a:r>
+              <a:rPr lang="en-US" sz="1300" i="1" dirty="0">
+                <a:solidFill>
+                  <a:srgbClr val="1C2833"/>
+                </a:solidFill>
+                <a:latin typeface="Georgia" pitchFamily="34" charset="0"/>
+                <a:ea typeface="Georgia" pitchFamily="34" charset="-122"/>
+                <a:cs typeface="Georgia" pitchFamily="34" charset="-120"/>
+              </a:rPr>
+              <a:t>__________</a:t>
+            </a:r>
+            <a:endParaRPr lang="en-US" sz="1300" dirty="0"/>
+          </a:p>
+        </p:txBody>
+      </p:sp>
+      <p:sp>
+        <p:nvSpPr>
+          <p:cNvPr id="13" name="Text 11"/>
+          <p:cNvSpPr/>
+          <p:nvPr/>
+        </p:nvSpPr>
+        <p:spPr>
+          <a:xfrm>
+            <a:off x="692051" y="3188643"/>
+            <a:ext cx="7973389" cy="230981"/>
+          </a:xfrm>
+          <a:prstGeom prst="rect">
+            <a:avLst/>
+          </a:prstGeom>
+          <a:noFill/>
+          <a:ln/>
+        </p:spPr>
+        <p:txBody>
+          <a:bodyPr wrap="square" lIns="0" tIns="0" rIns="0" bIns="0" rtlCol="0" anchor="t"/>
+          <a:lstStyle/>
+          <a:p>
+            <a:pPr algn="l" indent="0" marL="0">
+              <a:lnSpc>
+                <a:spcPts val="1820"/>
+              </a:lnSpc>
+              <a:spcBef>
+                <a:spcPts val="300"/>
+              </a:spcBef>
+              <a:spcAft>
+                <a:spcPts val="300"/>
+              </a:spcAft>
+              <a:buNone/>
+            </a:pPr>
+            <a:r>
+              <a:rPr lang="en-US" sz="1300" i="1" dirty="0">
+                <a:solidFill>
+                  <a:srgbClr val="1C2833"/>
+                </a:solidFill>
+                <a:latin typeface="Georgia" pitchFamily="34" charset="0"/>
+                <a:ea typeface="Georgia" pitchFamily="34" charset="-122"/>
+                <a:cs typeface="Georgia" pitchFamily="34" charset="-120"/>
+              </a:rPr>
+              <a:t>__________</a:t>
+            </a:r>
+            <a:endParaRPr lang="en-US" sz="1300" dirty="0"/>
+          </a:p>
+        </p:txBody>
+      </p:sp>
+      <p:sp>
+        <p:nvSpPr>
+          <p:cNvPr id="14" name="Text 12"/>
+          <p:cNvSpPr/>
+          <p:nvPr/>
+        </p:nvSpPr>
+        <p:spPr>
+          <a:xfrm>
+            <a:off x="692051" y="3457724"/>
+            <a:ext cx="7973389" cy="461963"/>
+          </a:xfrm>
+          <a:prstGeom prst="rect">
+            <a:avLst/>
+          </a:prstGeom>
+          <a:noFill/>
+          <a:ln/>
+        </p:spPr>
+        <p:txBody>
+          <a:bodyPr wrap="square" lIns="0" tIns="0" rIns="0" bIns="0" rtlCol="0" anchor="t"/>
+          <a:lstStyle/>
+          <a:p>
+            <a:pPr algn="l" indent="0" marL="0">
+              <a:lnSpc>
+                <a:spcPts val="1820"/>
+              </a:lnSpc>
+              <a:spcBef>
+                <a:spcPts val="300"/>
+              </a:spcBef>
+              <a:spcAft>
+                <a:spcPts val="300"/>
+              </a:spcAft>
+              <a:buNone/>
+            </a:pPr>
+            <a:r>
+              <a:rPr lang="en-US" sz="1300" i="1" dirty="0">
+                <a:solidFill>
+                  <a:srgbClr val="1C2833"/>
+                </a:solidFill>
+                <a:latin typeface="Georgia" pitchFamily="34" charset="0"/>
+                <a:ea typeface="Georgia" pitchFamily="34" charset="-122"/>
+                <a:cs typeface="Georgia" pitchFamily="34" charset="-120"/>
+              </a:rPr>
+              <a:t>__________ Division of labour (Partner A): __________ Division of labour (Partner B): __________ Source we'll cite: __________ (PDF + section) ```</a:t>
+            </a:r>
+            <a:endParaRPr lang="en-US" sz="1300" dirty="0"/>
+          </a:p>
+        </p:txBody>
+      </p:sp>
+      <p:sp>
+        <p:nvSpPr>
+          <p:cNvPr id="15" name="Text 13"/>
           <p:cNvSpPr/>
           <p:nvPr/>
         </p:nvSpPr>
@@ -2503,7 +3065,7 @@
                 <a:ea typeface="Georgia" pitchFamily="34" charset="-122"/>
                 <a:cs typeface="Georgia" pitchFamily="34" charset="-120"/>
               </a:rPr>
-              <a:t>Citation(s) used in this lesson</a:t>
+              <a:t>Homework</a:t>
             </a:r>
             <a:endParaRPr lang="en-US" sz="1800" dirty="0"/>
           </a:p>
@@ -2517,8 +3079,8 @@
         </p:nvSpPr>
         <p:spPr>
           <a:xfrm>
-            <a:off x="406301" y="870942"/>
-            <a:ext cx="8498026" cy="222796"/>
+            <a:off x="634901" y="883593"/>
+            <a:ext cx="8102798" cy="281880"/>
           </a:xfrm>
           <a:prstGeom prst="rect">
             <a:avLst/>
@@ -2530,17 +3092,15 @@
           <a:bodyPr wrap="square" lIns="0" tIns="0" rIns="0" bIns="0" rtlCol="0" anchor="t"/>
           <a:lstStyle/>
           <a:p>
-            <a:pPr algn="l" indent="0" marL="0">
-              <a:lnSpc>
-                <a:spcPts val="1680"/>
-              </a:lnSpc>
-              <a:spcBef>
-                <a:spcPts val="300"/>
-              </a:spcBef>
-              <a:spcAft>
-                <a:spcPts val="300"/>
-              </a:spcAft>
-              <a:buNone/>
+            <a:pPr algn="l" marL="342900" indent="-342900">
+              <a:lnSpc>
+                <a:spcPts val="1620"/>
+              </a:lnSpc>
+              <a:spcAft>
+                <a:spcPts val="300"/>
+              </a:spcAft>
+              <a:buSzPct val="100000"/>
+              <a:buChar char="•"/>
             </a:pPr>
             <a:r>
               <a:rPr lang="en-US" sz="1200" dirty="0">
@@ -2551,8 +3111,33 @@
                 <a:ea typeface="Arial" pitchFamily="34" charset="-122"/>
                 <a:cs typeface="Arial" pitchFamily="34" charset="-120"/>
               </a:rPr>
-              <a:t>– Pair-chosen source from </a:t>
-            </a:r>
+              <a:t>Whatever didn't get done in class — finish at home tonight.</a:t>
+            </a:r>
+            <a:endParaRPr lang="en-US" sz="1200" dirty="0"/>
+          </a:p>
+        </p:txBody>
+      </p:sp>
+      <p:sp>
+        <p:nvSpPr>
+          <p:cNvPr id="5" name="Text 3"/>
+          <p:cNvSpPr/>
+          <p:nvPr/>
+        </p:nvSpPr>
+        <p:spPr>
+          <a:xfrm>
+            <a:off x="406301" y="4434929"/>
+            <a:ext cx="8498026" cy="213271"/>
+          </a:xfrm>
+          <a:prstGeom prst="rect">
+            <a:avLst/>
+          </a:prstGeom>
+          <a:noFill/>
+          <a:ln/>
+        </p:spPr>
+        <p:txBody>
+          <a:bodyPr wrap="square" lIns="0" tIns="0" rIns="0" bIns="0" rtlCol="0" anchor="t"/>
+          <a:lstStyle/>
+          <a:p>
             <a:pPr algn="l" indent="0" marL="0">
               <a:lnSpc>
                 <a:spcPts val="1680"/>
@@ -2574,15 +3159,724 @@
                 <a:ea typeface="Arial" pitchFamily="34" charset="-122"/>
                 <a:cs typeface="Arial" pitchFamily="34" charset="-120"/>
               </a:rPr>
+              <a:t>Middle ·  · IKS Curriculum</a:t>
+            </a:r>
+            <a:endParaRPr lang="en-US" sz="1200" dirty="0"/>
+          </a:p>
+        </p:txBody>
+      </p:sp>
+    </p:spTree>
+  </p:cSld>
+  <p:clrMapOvr>
+    <a:masterClrMapping/>
+  </p:clrMapOvr>
+</p:sld>
+</file>
+
+<file path=ppt/slides/slide12.xml><?xml version="1.0" encoding="utf-8"?>
+<p:sld xmlns:a="http://schemas.openxmlformats.org/drawingml/2006/main" xmlns:r="http://schemas.openxmlformats.org/officeDocument/2006/relationships" xmlns:p="http://schemas.openxmlformats.org/presentationml/2006/main">
+  <p:cSld name="Slide 12">
+    <p:bg>
+      <p:bgPr>
+        <a:solidFill>
+          <a:srgbClr val="FFFFFF"/>
+        </a:solidFill>
+      </p:bgPr>
+    </p:bg>
+    <p:spTree>
+      <p:nvGrpSpPr>
+        <p:cNvPr id="1" name=""/>
+        <p:cNvGrpSpPr/>
+        <p:nvPr/>
+      </p:nvGrpSpPr>
+      <p:grpSpPr>
+        <a:xfrm>
+          <a:off x="0" y="0"/>
+          <a:ext cx="0" cy="0"/>
+          <a:chOff x="0" y="0"/>
+          <a:chExt cx="0" cy="0"/>
+        </a:xfrm>
+      </p:grpSpPr>
+      <p:sp>
+        <p:nvSpPr>
+          <p:cNvPr id="2" name="Text 0"/>
+          <p:cNvSpPr/>
+          <p:nvPr/>
+        </p:nvSpPr>
+        <p:spPr>
+          <a:xfrm>
+            <a:off x="0" y="0"/>
+            <a:ext cx="9144000" cy="101501"/>
+          </a:xfrm>
+          <a:prstGeom prst="rect">
+            <a:avLst/>
+          </a:prstGeom>
+          <a:solidFill>
+            <a:srgbClr val="277884"/>
+          </a:solidFill>
+          <a:ln/>
+        </p:spPr>
+        <p:txBody>
+          <a:bodyPr wrap="square" rtlCol="0" anchor="ctr"/>
+          <a:lstStyle/>
+          <a:p>
+            <a:pPr indent="0" marL="0">
+              <a:buNone/>
+            </a:pPr>
+            <a:endParaRPr lang="en-US" dirty="0"/>
+          </a:p>
+        </p:txBody>
+      </p:sp>
+      <p:sp>
+        <p:nvSpPr>
+          <p:cNvPr id="3" name="Text 1"/>
+          <p:cNvSpPr/>
+          <p:nvPr/>
+        </p:nvSpPr>
+        <p:spPr>
+          <a:xfrm>
+            <a:off x="406301" y="457051"/>
+            <a:ext cx="8498026" cy="274290"/>
+          </a:xfrm>
+          <a:prstGeom prst="rect">
+            <a:avLst/>
+          </a:prstGeom>
+          <a:noFill/>
+          <a:ln/>
+        </p:spPr>
+        <p:txBody>
+          <a:bodyPr wrap="square" lIns="0" tIns="0" rIns="0" bIns="0" rtlCol="0" anchor="t"/>
+          <a:lstStyle/>
+          <a:p>
+            <a:pPr algn="l" indent="0" marL="0">
+              <a:lnSpc>
+                <a:spcPts val="2160"/>
+              </a:lnSpc>
+              <a:spcBef>
+                <a:spcPts val="600"/>
+              </a:spcBef>
+              <a:spcAft>
+                <a:spcPts val="800"/>
+              </a:spcAft>
+              <a:buNone/>
+            </a:pPr>
+            <a:r>
+              <a:rPr lang="en-US" sz="1800" b="1" dirty="0">
+                <a:solidFill>
+                  <a:srgbClr val="FE4447"/>
+                </a:solidFill>
+                <a:latin typeface="Georgia" pitchFamily="34" charset="0"/>
+                <a:ea typeface="Georgia" pitchFamily="34" charset="-122"/>
+                <a:cs typeface="Georgia" pitchFamily="34" charset="-120"/>
+              </a:rPr>
+              <a:t>Differentiation</a:t>
+            </a:r>
+            <a:endParaRPr lang="en-US" sz="1800" dirty="0"/>
+          </a:p>
+        </p:txBody>
+      </p:sp>
+      <p:sp>
+        <p:nvSpPr>
+          <p:cNvPr id="4" name="Text 2"/>
+          <p:cNvSpPr/>
+          <p:nvPr/>
+        </p:nvSpPr>
+        <p:spPr>
+          <a:xfrm>
+            <a:off x="634901" y="883593"/>
+            <a:ext cx="8102798" cy="731341"/>
+          </a:xfrm>
+          <a:prstGeom prst="rect">
+            <a:avLst/>
+          </a:prstGeom>
+          <a:noFill/>
+          <a:ln/>
+        </p:spPr>
+        <p:txBody>
+          <a:bodyPr wrap="square" lIns="0" tIns="0" rIns="0" bIns="0" rtlCol="0" anchor="t"/>
+          <a:lstStyle/>
+          <a:p>
+            <a:pPr algn="l" marL="342900" indent="-342900">
+              <a:lnSpc>
+                <a:spcPts val="1620"/>
+              </a:lnSpc>
+              <a:spcAft>
+                <a:spcPts val="300"/>
+              </a:spcAft>
+              <a:buSzPct val="100000"/>
+              <a:buChar char="•"/>
+            </a:pPr>
+            <a:r>
+              <a:rPr lang="en-US" sz="1200" b="1" dirty="0">
+                <a:solidFill>
+                  <a:srgbClr val="1C2833"/>
+                </a:solidFill>
+                <a:latin typeface="Arial" pitchFamily="34" charset="0"/>
+                <a:ea typeface="Arial" pitchFamily="34" charset="-122"/>
+                <a:cs typeface="Arial" pitchFamily="34" charset="-120"/>
+              </a:rPr>
+              <a:t>Tier up:</a:t>
+            </a:r>
+            <a:pPr algn="l" indent="0" marL="0">
+              <a:lnSpc>
+                <a:spcPts val="1620"/>
+              </a:lnSpc>
+              <a:spcAft>
+                <a:spcPts val="300"/>
+              </a:spcAft>
+              <a:buNone/>
+            </a:pPr>
+            <a:r>
+              <a:rPr lang="en-US" sz="1200" dirty="0">
+                <a:solidFill>
+                  <a:srgbClr val="1C2833"/>
+                </a:solidFill>
+                <a:latin typeface="Arial" pitchFamily="34" charset="0"/>
+                <a:ea typeface="Arial" pitchFamily="34" charset="-122"/>
+                <a:cs typeface="Arial" pitchFamily="34" charset="-120"/>
+              </a:rPr>
+              <a:t> Stretch goal — add a comparison element. (E.g. video: include a side-by-side speed comparison; workbook: include 5 standard-algorithm problems for contrast; data: also test mental "near-base" additions.)</a:t>
+            </a:r>
+            <a:endParaRPr lang="en-US" sz="1200" dirty="0"/>
+          </a:p>
+          <a:p>
+            <a:pPr algn="l" marL="342900" indent="-342900">
+              <a:lnSpc>
+                <a:spcPts val="1620"/>
+              </a:lnSpc>
+              <a:spcAft>
+                <a:spcPts val="300"/>
+              </a:spcAft>
+              <a:buSzPct val="100000"/>
+              <a:buChar char="•"/>
+            </a:pPr>
+            <a:r>
+              <a:rPr lang="en-US" sz="1200" b="1" dirty="0">
+                <a:solidFill>
+                  <a:srgbClr val="1C2833"/>
+                </a:solidFill>
+                <a:latin typeface="Arial" pitchFamily="34" charset="0"/>
+                <a:ea typeface="Arial" pitchFamily="34" charset="-122"/>
+                <a:cs typeface="Arial" pitchFamily="34" charset="-120"/>
+              </a:rPr>
+              <a:t>Tier down:</a:t>
+            </a:r>
+            <a:pPr algn="l" indent="0" marL="0">
+              <a:lnSpc>
+                <a:spcPts val="1620"/>
+              </a:lnSpc>
+              <a:spcAft>
+                <a:spcPts val="300"/>
+              </a:spcAft>
+              <a:buNone/>
+            </a:pPr>
+            <a:r>
+              <a:rPr lang="en-US" sz="1200" dirty="0">
+                <a:solidFill>
+                  <a:srgbClr val="1C2833"/>
+                </a:solidFill>
+                <a:latin typeface="Arial" pitchFamily="34" charset="0"/>
+                <a:ea typeface="Arial" pitchFamily="34" charset="-122"/>
+                <a:cs typeface="Arial" pitchFamily="34" charset="-120"/>
+              </a:rPr>
+              <a:t> Allow simpler format mid-stream. A clean workbook beats a half-built video.</a:t>
+            </a:r>
+            <a:endParaRPr lang="en-US" sz="1200" dirty="0"/>
+          </a:p>
+        </p:txBody>
+      </p:sp>
+      <p:sp>
+        <p:nvSpPr>
+          <p:cNvPr id="5" name="Text 3"/>
+          <p:cNvSpPr/>
+          <p:nvPr/>
+        </p:nvSpPr>
+        <p:spPr>
+          <a:xfrm>
+            <a:off x="406301" y="4434929"/>
+            <a:ext cx="8498026" cy="213271"/>
+          </a:xfrm>
+          <a:prstGeom prst="rect">
+            <a:avLst/>
+          </a:prstGeom>
+          <a:noFill/>
+          <a:ln/>
+        </p:spPr>
+        <p:txBody>
+          <a:bodyPr wrap="square" lIns="0" tIns="0" rIns="0" bIns="0" rtlCol="0" anchor="t"/>
+          <a:lstStyle/>
+          <a:p>
+            <a:pPr algn="l" indent="0" marL="0">
+              <a:lnSpc>
+                <a:spcPts val="1680"/>
+              </a:lnSpc>
+              <a:spcBef>
+                <a:spcPts val="300"/>
+              </a:spcBef>
+              <a:spcAft>
+                <a:spcPts val="300"/>
+              </a:spcAft>
+              <a:buNone/>
+            </a:pPr>
+            <a:r>
+              <a:rPr lang="en-US" sz="1200" dirty="0">
+                <a:solidFill>
+                  <a:srgbClr val="1C2833"/>
+                </a:solidFill>
+                <a:latin typeface="Arial" pitchFamily="34" charset="0"/>
+                <a:ea typeface="Arial" pitchFamily="34" charset="-122"/>
+                <a:cs typeface="Arial" pitchFamily="34" charset="-120"/>
+              </a:rPr>
+              <a:t>Middle ·  · IKS Curriculum</a:t>
+            </a:r>
+            <a:endParaRPr lang="en-US" sz="1200" dirty="0"/>
+          </a:p>
+        </p:txBody>
+      </p:sp>
+    </p:spTree>
+  </p:cSld>
+  <p:clrMapOvr>
+    <a:masterClrMapping/>
+  </p:clrMapOvr>
+</p:sld>
+</file>
+
+<file path=ppt/slides/slide13.xml><?xml version="1.0" encoding="utf-8"?>
+<p:sld xmlns:a="http://schemas.openxmlformats.org/drawingml/2006/main" xmlns:r="http://schemas.openxmlformats.org/officeDocument/2006/relationships" xmlns:p="http://schemas.openxmlformats.org/presentationml/2006/main">
+  <p:cSld name="Slide 13">
+    <p:bg>
+      <p:bgPr>
+        <a:solidFill>
+          <a:srgbClr val="FFFFFF"/>
+        </a:solidFill>
+      </p:bgPr>
+    </p:bg>
+    <p:spTree>
+      <p:nvGrpSpPr>
+        <p:cNvPr id="1" name=""/>
+        <p:cNvGrpSpPr/>
+        <p:nvPr/>
+      </p:nvGrpSpPr>
+      <p:grpSpPr>
+        <a:xfrm>
+          <a:off x="0" y="0"/>
+          <a:ext cx="0" cy="0"/>
+          <a:chOff x="0" y="0"/>
+          <a:chExt cx="0" cy="0"/>
+        </a:xfrm>
+      </p:grpSpPr>
+      <p:sp>
+        <p:nvSpPr>
+          <p:cNvPr id="2" name="Text 0"/>
+          <p:cNvSpPr/>
+          <p:nvPr/>
+        </p:nvSpPr>
+        <p:spPr>
+          <a:xfrm>
+            <a:off x="0" y="0"/>
+            <a:ext cx="9144000" cy="101501"/>
+          </a:xfrm>
+          <a:prstGeom prst="rect">
+            <a:avLst/>
+          </a:prstGeom>
+          <a:solidFill>
+            <a:srgbClr val="277884"/>
+          </a:solidFill>
+          <a:ln/>
+        </p:spPr>
+        <p:txBody>
+          <a:bodyPr wrap="square" rtlCol="0" anchor="ctr"/>
+          <a:lstStyle/>
+          <a:p>
+            <a:pPr indent="0" marL="0">
+              <a:buNone/>
+            </a:pPr>
+            <a:endParaRPr lang="en-US" dirty="0"/>
+          </a:p>
+        </p:txBody>
+      </p:sp>
+      <p:sp>
+        <p:nvSpPr>
+          <p:cNvPr id="3" name="Text 1"/>
+          <p:cNvSpPr/>
+          <p:nvPr/>
+        </p:nvSpPr>
+        <p:spPr>
+          <a:xfrm>
+            <a:off x="406301" y="457051"/>
+            <a:ext cx="8498026" cy="274290"/>
+          </a:xfrm>
+          <a:prstGeom prst="rect">
+            <a:avLst/>
+          </a:prstGeom>
+          <a:noFill/>
+          <a:ln/>
+        </p:spPr>
+        <p:txBody>
+          <a:bodyPr wrap="square" lIns="0" tIns="0" rIns="0" bIns="0" rtlCol="0" anchor="t"/>
+          <a:lstStyle/>
+          <a:p>
+            <a:pPr algn="l" indent="0" marL="0">
+              <a:lnSpc>
+                <a:spcPts val="2160"/>
+              </a:lnSpc>
+              <a:spcBef>
+                <a:spcPts val="600"/>
+              </a:spcBef>
+              <a:spcAft>
+                <a:spcPts val="800"/>
+              </a:spcAft>
+              <a:buNone/>
+            </a:pPr>
+            <a:r>
+              <a:rPr lang="en-US" sz="1800" b="1" dirty="0">
+                <a:solidFill>
+                  <a:srgbClr val="FE4447"/>
+                </a:solidFill>
+                <a:latin typeface="Georgia" pitchFamily="34" charset="0"/>
+                <a:ea typeface="Georgia" pitchFamily="34" charset="-122"/>
+                <a:cs typeface="Georgia" pitchFamily="34" charset="-120"/>
+              </a:rPr>
+              <a:t>Teacher notes</a:t>
+            </a:r>
+            <a:endParaRPr lang="en-US" sz="1800" dirty="0"/>
+          </a:p>
+        </p:txBody>
+      </p:sp>
+      <p:sp>
+        <p:nvSpPr>
+          <p:cNvPr id="4" name="Text 2"/>
+          <p:cNvSpPr/>
+          <p:nvPr/>
+        </p:nvSpPr>
+        <p:spPr>
+          <a:xfrm>
+            <a:off x="634901" y="883593"/>
+            <a:ext cx="8102798" cy="937022"/>
+          </a:xfrm>
+          <a:prstGeom prst="rect">
+            <a:avLst/>
+          </a:prstGeom>
+          <a:noFill/>
+          <a:ln/>
+        </p:spPr>
+        <p:txBody>
+          <a:bodyPr wrap="square" lIns="0" tIns="0" rIns="0" bIns="0" rtlCol="0" anchor="t"/>
+          <a:lstStyle/>
+          <a:p>
+            <a:pPr algn="l" marL="342900" indent="-342900">
+              <a:lnSpc>
+                <a:spcPts val="1620"/>
+              </a:lnSpc>
+              <a:spcAft>
+                <a:spcPts val="300"/>
+              </a:spcAft>
+              <a:buSzPct val="100000"/>
+              <a:buChar char="•"/>
+            </a:pPr>
+            <a:r>
+              <a:rPr lang="en-US" sz="1200" dirty="0">
+                <a:solidFill>
+                  <a:srgbClr val="1C2833"/>
+                </a:solidFill>
+                <a:latin typeface="Arial" pitchFamily="34" charset="0"/>
+                <a:ea typeface="Arial" pitchFamily="34" charset="-122"/>
+                <a:cs typeface="Arial" pitchFamily="34" charset="-120"/>
+              </a:rPr>
+              <a:t>For video projects: students often shoot poor-quality video at home. Encourage them to rehearse and shoot in one or two takes — the </a:t>
+            </a:r>
+            <a:pPr algn="l" indent="0" marL="0">
+              <a:lnSpc>
+                <a:spcPts val="1620"/>
+              </a:lnSpc>
+              <a:spcAft>
+                <a:spcPts val="300"/>
+              </a:spcAft>
+              <a:buNone/>
+            </a:pPr>
+            <a:r>
+              <a:rPr lang="en-US" sz="1200" i="1" dirty="0">
+                <a:solidFill>
+                  <a:srgbClr val="1C2833"/>
+                </a:solidFill>
+                <a:latin typeface="Arial" pitchFamily="34" charset="0"/>
+                <a:ea typeface="Arial" pitchFamily="34" charset="-122"/>
+                <a:cs typeface="Arial" pitchFamily="34" charset="-120"/>
+              </a:rPr>
+              <a:t>teaching content</a:t>
+            </a:r>
+            <a:pPr algn="l" indent="0" marL="0">
+              <a:lnSpc>
+                <a:spcPts val="1620"/>
+              </a:lnSpc>
+              <a:spcAft>
+                <a:spcPts val="300"/>
+              </a:spcAft>
+              <a:buNone/>
+            </a:pPr>
+            <a:r>
+              <a:rPr lang="en-US" sz="1200" dirty="0">
+                <a:solidFill>
+                  <a:srgbClr val="1C2833"/>
+                </a:solidFill>
+                <a:latin typeface="Arial" pitchFamily="34" charset="0"/>
+                <a:ea typeface="Arial" pitchFamily="34" charset="-122"/>
+                <a:cs typeface="Arial" pitchFamily="34" charset="-120"/>
+              </a:rPr>
+              <a:t> matters more than production value.</a:t>
+            </a:r>
+            <a:endParaRPr lang="en-US" sz="1200" dirty="0"/>
+          </a:p>
+          <a:p>
+            <a:pPr algn="l" marL="342900" indent="-342900">
+              <a:lnSpc>
+                <a:spcPts val="1620"/>
+              </a:lnSpc>
+              <a:spcAft>
+                <a:spcPts val="300"/>
+              </a:spcAft>
+              <a:buSzPct val="100000"/>
+              <a:buChar char="•"/>
+            </a:pPr>
+            <a:r>
+              <a:rPr lang="en-US" sz="1200" dirty="0">
+                <a:solidFill>
+                  <a:srgbClr val="1C2833"/>
+                </a:solidFill>
+                <a:latin typeface="Arial" pitchFamily="34" charset="0"/>
+                <a:ea typeface="Arial" pitchFamily="34" charset="-122"/>
+                <a:cs typeface="Arial" pitchFamily="34" charset="-120"/>
+              </a:rPr>
+              <a:t>For data projects: be wary of small-sample misinterpretation. If a pair has only 3 data points and one shows the dot method is slower, that's a real finding — let them report it. Statistical thinking is part of the project.</a:t>
+            </a:r>
+            <a:endParaRPr lang="en-US" sz="1200" dirty="0"/>
+          </a:p>
+        </p:txBody>
+      </p:sp>
+      <p:sp>
+        <p:nvSpPr>
+          <p:cNvPr id="5" name="Text 3"/>
+          <p:cNvSpPr/>
+          <p:nvPr/>
+        </p:nvSpPr>
+        <p:spPr>
+          <a:xfrm>
+            <a:off x="406301" y="4434929"/>
+            <a:ext cx="8498026" cy="213271"/>
+          </a:xfrm>
+          <a:prstGeom prst="rect">
+            <a:avLst/>
+          </a:prstGeom>
+          <a:noFill/>
+          <a:ln/>
+        </p:spPr>
+        <p:txBody>
+          <a:bodyPr wrap="square" lIns="0" tIns="0" rIns="0" bIns="0" rtlCol="0" anchor="t"/>
+          <a:lstStyle/>
+          <a:p>
+            <a:pPr algn="l" indent="0" marL="0">
+              <a:lnSpc>
+                <a:spcPts val="1680"/>
+              </a:lnSpc>
+              <a:spcBef>
+                <a:spcPts val="300"/>
+              </a:spcBef>
+              <a:spcAft>
+                <a:spcPts val="300"/>
+              </a:spcAft>
+              <a:buNone/>
+            </a:pPr>
+            <a:r>
+              <a:rPr lang="en-US" sz="1200" dirty="0">
+                <a:solidFill>
+                  <a:srgbClr val="1C2833"/>
+                </a:solidFill>
+                <a:latin typeface="Arial" pitchFamily="34" charset="0"/>
+                <a:ea typeface="Arial" pitchFamily="34" charset="-122"/>
+                <a:cs typeface="Arial" pitchFamily="34" charset="-120"/>
+              </a:rPr>
+              <a:t>Middle ·  · IKS Curriculum</a:t>
+            </a:r>
+            <a:endParaRPr lang="en-US" sz="1200" dirty="0"/>
+          </a:p>
+        </p:txBody>
+      </p:sp>
+    </p:spTree>
+  </p:cSld>
+  <p:clrMapOvr>
+    <a:masterClrMapping/>
+  </p:clrMapOvr>
+</p:sld>
+</file>
+
+<file path=ppt/slides/slide14.xml><?xml version="1.0" encoding="utf-8"?>
+<p:sld xmlns:a="http://schemas.openxmlformats.org/drawingml/2006/main" xmlns:r="http://schemas.openxmlformats.org/officeDocument/2006/relationships" xmlns:p="http://schemas.openxmlformats.org/presentationml/2006/main">
+  <p:cSld name="Slide 14">
+    <p:bg>
+      <p:bgPr>
+        <a:solidFill>
+          <a:srgbClr val="FFFFFF"/>
+        </a:solidFill>
+      </p:bgPr>
+    </p:bg>
+    <p:spTree>
+      <p:nvGrpSpPr>
+        <p:cNvPr id="1" name=""/>
+        <p:cNvGrpSpPr/>
+        <p:nvPr/>
+      </p:nvGrpSpPr>
+      <p:grpSpPr>
+        <a:xfrm>
+          <a:off x="0" y="0"/>
+          <a:ext cx="0" cy="0"/>
+          <a:chOff x="0" y="0"/>
+          <a:chExt cx="0" cy="0"/>
+        </a:xfrm>
+      </p:grpSpPr>
+      <p:sp>
+        <p:nvSpPr>
+          <p:cNvPr id="2" name="Text 0"/>
+          <p:cNvSpPr/>
+          <p:nvPr/>
+        </p:nvSpPr>
+        <p:spPr>
+          <a:xfrm>
+            <a:off x="0" y="0"/>
+            <a:ext cx="9144000" cy="101501"/>
+          </a:xfrm>
+          <a:prstGeom prst="rect">
+            <a:avLst/>
+          </a:prstGeom>
+          <a:solidFill>
+            <a:srgbClr val="277884"/>
+          </a:solidFill>
+          <a:ln/>
+        </p:spPr>
+        <p:txBody>
+          <a:bodyPr wrap="square" rtlCol="0" anchor="ctr"/>
+          <a:lstStyle/>
+          <a:p>
+            <a:pPr indent="0" marL="0">
+              <a:buNone/>
+            </a:pPr>
+            <a:endParaRPr lang="en-US" dirty="0"/>
+          </a:p>
+        </p:txBody>
+      </p:sp>
+      <p:sp>
+        <p:nvSpPr>
+          <p:cNvPr id="3" name="Text 1"/>
+          <p:cNvSpPr/>
+          <p:nvPr/>
+        </p:nvSpPr>
+        <p:spPr>
+          <a:xfrm>
+            <a:off x="406301" y="457051"/>
+            <a:ext cx="8498026" cy="274290"/>
+          </a:xfrm>
+          <a:prstGeom prst="rect">
+            <a:avLst/>
+          </a:prstGeom>
+          <a:noFill/>
+          <a:ln/>
+        </p:spPr>
+        <p:txBody>
+          <a:bodyPr wrap="square" lIns="0" tIns="0" rIns="0" bIns="0" rtlCol="0" anchor="t"/>
+          <a:lstStyle/>
+          <a:p>
+            <a:pPr algn="l" indent="0" marL="0">
+              <a:lnSpc>
+                <a:spcPts val="2160"/>
+              </a:lnSpc>
+              <a:spcBef>
+                <a:spcPts val="600"/>
+              </a:spcBef>
+              <a:spcAft>
+                <a:spcPts val="800"/>
+              </a:spcAft>
+              <a:buNone/>
+            </a:pPr>
+            <a:r>
+              <a:rPr lang="en-US" sz="1800" b="1" dirty="0">
+                <a:solidFill>
+                  <a:srgbClr val="FE4447"/>
+                </a:solidFill>
+                <a:latin typeface="Georgia" pitchFamily="34" charset="0"/>
+                <a:ea typeface="Georgia" pitchFamily="34" charset="-122"/>
+                <a:cs typeface="Georgia" pitchFamily="34" charset="-120"/>
+              </a:rPr>
+              <a:t>Citation(s) used in this lesson</a:t>
+            </a:r>
+            <a:endParaRPr lang="en-US" sz="1800" dirty="0"/>
+          </a:p>
+        </p:txBody>
+      </p:sp>
+      <p:sp>
+        <p:nvSpPr>
+          <p:cNvPr id="4" name="Text 2"/>
+          <p:cNvSpPr/>
+          <p:nvPr/>
+        </p:nvSpPr>
+        <p:spPr>
+          <a:xfrm>
+            <a:off x="634901" y="883593"/>
+            <a:ext cx="8102798" cy="300930"/>
+          </a:xfrm>
+          <a:prstGeom prst="rect">
+            <a:avLst/>
+          </a:prstGeom>
+          <a:noFill/>
+          <a:ln/>
+        </p:spPr>
+        <p:txBody>
+          <a:bodyPr wrap="square" lIns="0" tIns="0" rIns="0" bIns="0" rtlCol="0" anchor="t"/>
+          <a:lstStyle/>
+          <a:p>
+            <a:pPr algn="l" marL="342900" indent="-342900">
+              <a:lnSpc>
+                <a:spcPts val="1620"/>
+              </a:lnSpc>
+              <a:spcAft>
+                <a:spcPts val="300"/>
+              </a:spcAft>
+              <a:buSzPct val="100000"/>
+              <a:buChar char="•"/>
+            </a:pPr>
+            <a:r>
+              <a:rPr lang="en-US" sz="1200" dirty="0">
+                <a:solidFill>
+                  <a:srgbClr val="1C2833"/>
+                </a:solidFill>
+                <a:latin typeface="Arial" pitchFamily="34" charset="0"/>
+                <a:ea typeface="Arial" pitchFamily="34" charset="-122"/>
+                <a:cs typeface="Arial" pitchFamily="34" charset="-120"/>
+              </a:rPr>
+              <a:t>Pair-chosen source from </a:t>
+            </a:r>
+            <a:pPr algn="l" indent="0" marL="0">
+              <a:lnSpc>
+                <a:spcPts val="1620"/>
+              </a:lnSpc>
+              <a:spcAft>
+                <a:spcPts val="300"/>
+              </a:spcAft>
+              <a:buNone/>
+            </a:pPr>
+            <a:r>
+              <a:rPr lang="en-US" sz="1200" dirty="0">
+                <a:solidFill>
+                  <a:srgbClr val="1C2833"/>
+                </a:solidFill>
+                <a:latin typeface="Arial" pitchFamily="34" charset="0"/>
+                <a:ea typeface="Arial" pitchFamily="34" charset="-122"/>
+                <a:cs typeface="Arial" pitchFamily="34" charset="-120"/>
+              </a:rPr>
               <a:t>sources.md</a:t>
             </a:r>
             <a:pPr algn="l" indent="0" marL="0">
               <a:lnSpc>
-                <a:spcPts val="1680"/>
-              </a:lnSpc>
-              <a:spcBef>
-                <a:spcPts val="300"/>
-              </a:spcBef>
+                <a:spcPts val="1620"/>
+              </a:lnSpc>
               <a:spcAft>
                 <a:spcPts val="300"/>
               </a:spcAft>
@@ -2755,7 +4049,7 @@
                 <a:ea typeface="Georgia" pitchFamily="34" charset="-122"/>
                 <a:cs typeface="Georgia" pitchFamily="34" charset="-120"/>
               </a:rPr>
-              <a:t>Materials</a:t>
+              <a:t>Learning objective</a:t>
             </a:r>
             <a:endParaRPr lang="en-US" sz="1800" dirty="0"/>
           </a:p>
@@ -2770,7 +4064,7 @@
         <p:spPr>
           <a:xfrm>
             <a:off x="406301" y="870942"/>
-            <a:ext cx="8498026" cy="222796"/>
+            <a:ext cx="8498026" cy="426541"/>
           </a:xfrm>
           <a:prstGeom prst="rect">
             <a:avLst/>
@@ -2803,53 +4097,7 @@
                 <a:ea typeface="Arial" pitchFamily="34" charset="-122"/>
                 <a:cs typeface="Arial" pitchFamily="34" charset="-120"/>
               </a:rPr>
-              <a:t>– All project materials brought by students. – A printed rubric (</a:t>
-            </a:r>
-            <a:pPr algn="l" indent="0" marL="0">
-              <a:lnSpc>
-                <a:spcPts val="1680"/>
-              </a:lnSpc>
-              <a:spcBef>
-                <a:spcPts val="300"/>
-              </a:spcBef>
-              <a:spcAft>
-                <a:spcPts val="300"/>
-              </a:spcAft>
-              <a:buNone/>
-            </a:pPr>
-            <a:r>
-              <a:rPr lang="en-US" sz="1200" dirty="0">
-                <a:solidFill>
-                  <a:srgbClr val="1C2833"/>
-                </a:solidFill>
-                <a:latin typeface="Arial" pitchFamily="34" charset="0"/>
-                <a:ea typeface="Arial" pitchFamily="34" charset="-122"/>
-                <a:cs typeface="Arial" pitchFamily="34" charset="-120"/>
-              </a:rPr>
-              <a:t>assessments/rubric.md</a:t>
-            </a:r>
-            <a:pPr algn="l" indent="0" marL="0">
-              <a:lnSpc>
-                <a:spcPts val="1680"/>
-              </a:lnSpc>
-              <a:spcBef>
-                <a:spcPts val="300"/>
-              </a:spcBef>
-              <a:spcAft>
-                <a:spcPts val="300"/>
-              </a:spcAft>
-              <a:buNone/>
-            </a:pPr>
-            <a:r>
-              <a:rPr lang="en-US" sz="1200" dirty="0">
-                <a:solidFill>
-                  <a:srgbClr val="1C2833"/>
-                </a:solidFill>
-                <a:latin typeface="Arial" pitchFamily="34" charset="0"/>
-                <a:ea typeface="Arial" pitchFamily="34" charset="-122"/>
-                <a:cs typeface="Arial" pitchFamily="34" charset="-120"/>
-              </a:rPr>
-              <a:t>) per pair. – Stopwatch.</a:t>
+              <a:t>By the end of this lesson, every pair will have a written project plan and at least one tangible artefact (script outline, first 5 workbook problems drafted, or first 3 data points collected) for their final project.</a:t>
             </a:r>
             <a:endParaRPr lang="en-US" sz="1200" dirty="0"/>
           </a:p>
@@ -3007,7 +4255,7 @@
                 <a:ea typeface="Georgia" pitchFamily="34" charset="-122"/>
                 <a:cs typeface="Georgia" pitchFamily="34" charset="-120"/>
               </a:rPr>
-              <a:t>Lesson flow</a:t>
+              <a:t>Materials</a:t>
             </a:r>
             <a:endParaRPr lang="en-US" sz="1800" dirty="0"/>
           </a:p>
@@ -3016,6 +4264,140 @@
       <p:sp>
         <p:nvSpPr>
           <p:cNvPr id="4" name="Text 2"/>
+          <p:cNvSpPr/>
+          <p:nvPr/>
+        </p:nvSpPr>
+        <p:spPr>
+          <a:xfrm>
+            <a:off x="634901" y="883593"/>
+            <a:ext cx="8102798" cy="788491"/>
+          </a:xfrm>
+          <a:prstGeom prst="rect">
+            <a:avLst/>
+          </a:prstGeom>
+          <a:noFill/>
+          <a:ln/>
+        </p:spPr>
+        <p:txBody>
+          <a:bodyPr wrap="square" lIns="0" tIns="0" rIns="0" bIns="0" rtlCol="0" anchor="t"/>
+          <a:lstStyle/>
+          <a:p>
+            <a:pPr algn="l" marL="342900" indent="-342900">
+              <a:lnSpc>
+                <a:spcPts val="1620"/>
+              </a:lnSpc>
+              <a:spcAft>
+                <a:spcPts val="300"/>
+              </a:spcAft>
+              <a:buSzPct val="100000"/>
+              <a:buChar char="•"/>
+            </a:pPr>
+            <a:r>
+              <a:rPr lang="en-US" sz="1200" dirty="0">
+                <a:solidFill>
+                  <a:srgbClr val="1C2833"/>
+                </a:solidFill>
+                <a:latin typeface="Arial" pitchFamily="34" charset="0"/>
+                <a:ea typeface="Arial" pitchFamily="34" charset="-122"/>
+                <a:cs typeface="Arial" pitchFamily="34" charset="-120"/>
+              </a:rPr>
+              <a:t>All project materials brought by students.</a:t>
+            </a:r>
+            <a:endParaRPr lang="en-US" sz="1200" dirty="0"/>
+          </a:p>
+          <a:p>
+            <a:pPr algn="l" marL="342900" indent="-342900">
+              <a:lnSpc>
+                <a:spcPts val="1620"/>
+              </a:lnSpc>
+              <a:spcAft>
+                <a:spcPts val="300"/>
+              </a:spcAft>
+              <a:buSzPct val="100000"/>
+              <a:buChar char="•"/>
+            </a:pPr>
+            <a:r>
+              <a:rPr lang="en-US" sz="1200" dirty="0">
+                <a:solidFill>
+                  <a:srgbClr val="1C2833"/>
+                </a:solidFill>
+                <a:latin typeface="Arial" pitchFamily="34" charset="0"/>
+                <a:ea typeface="Arial" pitchFamily="34" charset="-122"/>
+                <a:cs typeface="Arial" pitchFamily="34" charset="-120"/>
+              </a:rPr>
+              <a:t>A printed rubric (</a:t>
+            </a:r>
+            <a:pPr algn="l" indent="0" marL="0">
+              <a:lnSpc>
+                <a:spcPts val="1620"/>
+              </a:lnSpc>
+              <a:spcAft>
+                <a:spcPts val="300"/>
+              </a:spcAft>
+              <a:buNone/>
+            </a:pPr>
+            <a:r>
+              <a:rPr lang="en-US" sz="1200" dirty="0">
+                <a:solidFill>
+                  <a:srgbClr val="1C2833"/>
+                </a:solidFill>
+                <a:latin typeface="Arial" pitchFamily="34" charset="0"/>
+                <a:ea typeface="Arial" pitchFamily="34" charset="-122"/>
+                <a:cs typeface="Arial" pitchFamily="34" charset="-120"/>
+              </a:rPr>
+              <a:t>assessments/rubric.md</a:t>
+            </a:r>
+            <a:pPr algn="l" indent="0" marL="0">
+              <a:lnSpc>
+                <a:spcPts val="1620"/>
+              </a:lnSpc>
+              <a:spcAft>
+                <a:spcPts val="300"/>
+              </a:spcAft>
+              <a:buNone/>
+            </a:pPr>
+            <a:r>
+              <a:rPr lang="en-US" sz="1200" dirty="0">
+                <a:solidFill>
+                  <a:srgbClr val="1C2833"/>
+                </a:solidFill>
+                <a:latin typeface="Arial" pitchFamily="34" charset="0"/>
+                <a:ea typeface="Arial" pitchFamily="34" charset="-122"/>
+                <a:cs typeface="Arial" pitchFamily="34" charset="-120"/>
+              </a:rPr>
+              <a:t>) per pair.</a:t>
+            </a:r>
+            <a:endParaRPr lang="en-US" sz="1200" dirty="0"/>
+          </a:p>
+          <a:p>
+            <a:pPr algn="l" marL="342900" indent="-342900">
+              <a:lnSpc>
+                <a:spcPts val="1620"/>
+              </a:lnSpc>
+              <a:spcAft>
+                <a:spcPts val="300"/>
+              </a:spcAft>
+              <a:buSzPct val="100000"/>
+              <a:buChar char="•"/>
+            </a:pPr>
+            <a:r>
+              <a:rPr lang="en-US" sz="1200" dirty="0">
+                <a:solidFill>
+                  <a:srgbClr val="1C2833"/>
+                </a:solidFill>
+                <a:latin typeface="Arial" pitchFamily="34" charset="0"/>
+                <a:ea typeface="Arial" pitchFamily="34" charset="-122"/>
+                <a:cs typeface="Arial" pitchFamily="34" charset="-120"/>
+              </a:rPr>
+              <a:t>Stopwatch.</a:t>
+            </a:r>
+            <a:endParaRPr lang="en-US" sz="1200" dirty="0"/>
+          </a:p>
+        </p:txBody>
+      </p:sp>
+      <p:sp>
+        <p:nvSpPr>
+          <p:cNvPr id="5" name="Text 3"/>
           <p:cNvSpPr/>
           <p:nvPr/>
         </p:nvSpPr>
@@ -3165,7 +4547,7 @@
                 <a:ea typeface="Georgia" pitchFamily="34" charset="-122"/>
                 <a:cs typeface="Georgia" pitchFamily="34" charset="-120"/>
               </a:rPr>
-              <a:t>Warm-up (5 min)</a:t>
+              <a:t>Lesson flow</a:t>
             </a:r>
             <a:endParaRPr lang="en-US" sz="1800" dirty="0"/>
           </a:p>
@@ -3174,54 +4556,6 @@
       <p:sp>
         <p:nvSpPr>
           <p:cNvPr id="4" name="Text 2"/>
-          <p:cNvSpPr/>
-          <p:nvPr/>
-        </p:nvSpPr>
-        <p:spPr>
-          <a:xfrm>
-            <a:off x="406301" y="870942"/>
-            <a:ext cx="8498026" cy="213271"/>
-          </a:xfrm>
-          <a:prstGeom prst="rect">
-            <a:avLst/>
-          </a:prstGeom>
-          <a:noFill/>
-          <a:ln/>
-        </p:spPr>
-        <p:txBody>
-          <a:bodyPr wrap="square" lIns="0" tIns="0" rIns="0" bIns="0" rtlCol="0" anchor="t"/>
-          <a:lstStyle/>
-          <a:p>
-            <a:pPr algn="l" indent="0" marL="0">
-              <a:lnSpc>
-                <a:spcPts val="1680"/>
-              </a:lnSpc>
-              <a:spcBef>
-                <a:spcPts val="300"/>
-              </a:spcBef>
-              <a:spcAft>
-                <a:spcPts val="300"/>
-              </a:spcAft>
-              <a:buNone/>
-            </a:pPr>
-            <a:r>
-              <a:rPr lang="en-US" sz="1200" dirty="0">
-                <a:solidFill>
-                  <a:srgbClr val="1C2833"/>
-                </a:solidFill>
-                <a:latin typeface="Arial" pitchFamily="34" charset="0"/>
-                <a:ea typeface="Arial" pitchFamily="34" charset="-122"/>
-                <a:cs typeface="Arial" pitchFamily="34" charset="-120"/>
-              </a:rPr>
-              <a:t>– Make-10 round. – Hand out the rubric. 60-second walk-through.</a:t>
-            </a:r>
-            <a:endParaRPr lang="en-US" sz="1200" dirty="0"/>
-          </a:p>
-        </p:txBody>
-      </p:sp>
-      <p:sp>
-        <p:nvSpPr>
-          <p:cNvPr id="5" name="Text 3"/>
           <p:cNvSpPr/>
           <p:nvPr/>
         </p:nvSpPr>
@@ -3371,7 +4705,7 @@
                 <a:ea typeface="Georgia" pitchFamily="34" charset="-122"/>
                 <a:cs typeface="Georgia" pitchFamily="34" charset="-120"/>
               </a:rPr>
-              <a:t>Core (35 min) — Workshop sprints</a:t>
+              <a:t>Warm-up (5 min)</a:t>
             </a:r>
             <a:endParaRPr lang="en-US" sz="1800" dirty="0"/>
           </a:p>
@@ -3385,8 +4719,8 @@
         </p:nvSpPr>
         <p:spPr>
           <a:xfrm>
-            <a:off x="406301" y="870942"/>
-            <a:ext cx="8498026" cy="213271"/>
+            <a:off x="634901" y="883593"/>
+            <a:ext cx="8102798" cy="525661"/>
           </a:xfrm>
           <a:prstGeom prst="rect">
             <a:avLst/>
@@ -3398,17 +4732,15 @@
           <a:bodyPr wrap="square" lIns="0" tIns="0" rIns="0" bIns="0" rtlCol="0" anchor="t"/>
           <a:lstStyle/>
           <a:p>
-            <a:pPr algn="l" indent="0" marL="0">
-              <a:lnSpc>
-                <a:spcPts val="1680"/>
-              </a:lnSpc>
-              <a:spcBef>
-                <a:spcPts val="300"/>
-              </a:spcBef>
-              <a:spcAft>
-                <a:spcPts val="300"/>
-              </a:spcAft>
-              <a:buNone/>
+            <a:pPr algn="l" marL="342900" indent="-342900">
+              <a:lnSpc>
+                <a:spcPts val="1620"/>
+              </a:lnSpc>
+              <a:spcAft>
+                <a:spcPts val="300"/>
+              </a:spcAft>
+              <a:buSzPct val="100000"/>
+              <a:buChar char="•"/>
             </a:pPr>
             <a:r>
               <a:rPr lang="en-US" sz="1200" dirty="0">
@@ -3419,47 +4751,23 @@
                 <a:ea typeface="Arial" pitchFamily="34" charset="-122"/>
                 <a:cs typeface="Arial" pitchFamily="34" charset="-120"/>
               </a:rPr>
-              <a:t>Same three-sprint structure as Panchabhuta Day 8:</a:t>
+              <a:t>Make-10 round.</a:t>
             </a:r>
             <a:endParaRPr lang="en-US" sz="1200" dirty="0"/>
           </a:p>
-        </p:txBody>
-      </p:sp>
-      <p:sp>
-        <p:nvSpPr>
-          <p:cNvPr id="5" name="Text 3"/>
-          <p:cNvSpPr/>
-          <p:nvPr/>
-        </p:nvSpPr>
-        <p:spPr>
-          <a:xfrm>
-            <a:off x="406301" y="1160413"/>
-            <a:ext cx="8498026" cy="639812"/>
-          </a:xfrm>
-          <a:prstGeom prst="rect">
-            <a:avLst/>
-          </a:prstGeom>
-          <a:noFill/>
-          <a:ln/>
-        </p:spPr>
-        <p:txBody>
-          <a:bodyPr wrap="square" lIns="0" tIns="0" rIns="0" bIns="0" rtlCol="0" anchor="t"/>
-          <a:lstStyle/>
-          <a:p>
-            <a:pPr algn="l" indent="0" marL="0">
-              <a:lnSpc>
-                <a:spcPts val="1680"/>
-              </a:lnSpc>
-              <a:spcBef>
-                <a:spcPts val="300"/>
-              </a:spcBef>
-              <a:spcAft>
-                <a:spcPts val="300"/>
-              </a:spcAft>
-              <a:buNone/>
-            </a:pPr>
-            <a:r>
-              <a:rPr lang="en-US" sz="1200" b="1" dirty="0">
+          <a:p>
+            <a:pPr algn="l" marL="342900" indent="-342900">
+              <a:lnSpc>
+                <a:spcPts val="1620"/>
+              </a:lnSpc>
+              <a:spcAft>
+                <a:spcPts val="300"/>
+              </a:spcAft>
+              <a:buSzPct val="100000"/>
+              <a:buChar char="•"/>
+            </a:pPr>
+            <a:r>
+              <a:rPr lang="en-US" sz="1200" dirty="0">
                 <a:solidFill>
                   <a:srgbClr val="1C2833"/>
                 </a:solidFill>
@@ -3467,30 +4775,7 @@
                 <a:ea typeface="Arial" pitchFamily="34" charset="-122"/>
                 <a:cs typeface="Arial" pitchFamily="34" charset="-120"/>
               </a:rPr>
-              <a:t>Sprint 1 (10 min) — Plan completion.</a:t>
-            </a:r>
-            <a:pPr algn="l" indent="0" marL="0">
-              <a:lnSpc>
-                <a:spcPts val="1680"/>
-              </a:lnSpc>
-              <a:spcBef>
-                <a:spcPts val="300"/>
-              </a:spcBef>
-              <a:spcAft>
-                <a:spcPts val="300"/>
-              </a:spcAft>
-              <a:buNone/>
-            </a:pPr>
-            <a:r>
-              <a:rPr lang="en-US" sz="1200" dirty="0">
-                <a:solidFill>
-                  <a:srgbClr val="1C2833"/>
-                </a:solidFill>
-                <a:latin typeface="Arial" pitchFamily="34" charset="0"/>
-                <a:ea typeface="Arial" pitchFamily="34" charset="-122"/>
-                <a:cs typeface="Arial" pitchFamily="34" charset="-120"/>
-              </a:rPr>
-              <a:t> Every pair finalises: – Format (video / workbook / data project) – One-sentence audience takeaway – Three-part structure of the artefact – Division of labour – The PDF section they'll cite (e.g. "Vedic Mathematics Batch1.pdf, §5.4")</a:t>
+              <a:t>Hand out the rubric. 60-second walk-through.</a:t>
             </a:r>
             <a:endParaRPr lang="en-US" sz="1200" dirty="0"/>
           </a:p>
@@ -3498,328 +4783,7 @@
       </p:sp>
       <p:sp>
         <p:nvSpPr>
-          <p:cNvPr id="6" name="Text 4"/>
-          <p:cNvSpPr/>
-          <p:nvPr/>
-        </p:nvSpPr>
-        <p:spPr>
-          <a:xfrm>
-            <a:off x="406301" y="1876425"/>
-            <a:ext cx="8498026" cy="213271"/>
-          </a:xfrm>
-          <a:prstGeom prst="rect">
-            <a:avLst/>
-          </a:prstGeom>
-          <a:noFill/>
-          <a:ln/>
-        </p:spPr>
-        <p:txBody>
-          <a:bodyPr wrap="square" lIns="0" tIns="0" rIns="0" bIns="0" rtlCol="0" anchor="t"/>
-          <a:lstStyle/>
-          <a:p>
-            <a:pPr algn="l" indent="0" marL="0">
-              <a:lnSpc>
-                <a:spcPts val="1680"/>
-              </a:lnSpc>
-              <a:spcBef>
-                <a:spcPts val="300"/>
-              </a:spcBef>
-              <a:spcAft>
-                <a:spcPts val="300"/>
-              </a:spcAft>
-              <a:buNone/>
-            </a:pPr>
-            <a:r>
-              <a:rPr lang="en-US" sz="1200" b="1" dirty="0">
-                <a:solidFill>
-                  <a:srgbClr val="1C2833"/>
-                </a:solidFill>
-                <a:latin typeface="Arial" pitchFamily="34" charset="0"/>
-                <a:ea typeface="Arial" pitchFamily="34" charset="-122"/>
-                <a:cs typeface="Arial" pitchFamily="34" charset="-120"/>
-              </a:rPr>
-              <a:t>Sprint 2 (10 min) — First artefact.</a:t>
-            </a:r>
-            <a:endParaRPr lang="en-US" sz="1200" dirty="0"/>
-          </a:p>
-        </p:txBody>
-      </p:sp>
-      <p:sp>
-        <p:nvSpPr>
-          <p:cNvPr id="7" name="Text 5"/>
-          <p:cNvSpPr/>
-          <p:nvPr/>
-        </p:nvSpPr>
-        <p:spPr>
-          <a:xfrm>
-            <a:off x="634901" y="2178546"/>
-            <a:ext cx="8102798" cy="975122"/>
-          </a:xfrm>
-          <a:prstGeom prst="rect">
-            <a:avLst/>
-          </a:prstGeom>
-          <a:noFill/>
-          <a:ln/>
-        </p:spPr>
-        <p:txBody>
-          <a:bodyPr wrap="square" lIns="0" tIns="0" rIns="0" bIns="0" rtlCol="0" anchor="t"/>
-          <a:lstStyle/>
-          <a:p>
-            <a:pPr algn="l" marL="342900" indent="-342900">
-              <a:lnSpc>
-                <a:spcPts val="1620"/>
-              </a:lnSpc>
-              <a:spcAft>
-                <a:spcPts val="300"/>
-              </a:spcAft>
-              <a:buSzPct val="100000"/>
-              <a:buChar char="•"/>
-            </a:pPr>
-            <a:r>
-              <a:rPr lang="en-US" sz="1200" b="1" dirty="0">
-                <a:solidFill>
-                  <a:srgbClr val="1C2833"/>
-                </a:solidFill>
-                <a:latin typeface="Arial" pitchFamily="34" charset="0"/>
-                <a:ea typeface="Arial" pitchFamily="34" charset="-122"/>
-                <a:cs typeface="Arial" pitchFamily="34" charset="-120"/>
-              </a:rPr>
-              <a:t>Video projects:</a:t>
-            </a:r>
-            <a:pPr algn="l" indent="0" marL="0">
-              <a:lnSpc>
-                <a:spcPts val="1620"/>
-              </a:lnSpc>
-              <a:spcAft>
-                <a:spcPts val="300"/>
-              </a:spcAft>
-              <a:buNone/>
-            </a:pPr>
-            <a:r>
-              <a:rPr lang="en-US" sz="1200" dirty="0">
-                <a:solidFill>
-                  <a:srgbClr val="1C2833"/>
-                </a:solidFill>
-                <a:latin typeface="Arial" pitchFamily="34" charset="0"/>
-                <a:ea typeface="Arial" pitchFamily="34" charset="-122"/>
-                <a:cs typeface="Arial" pitchFamily="34" charset="-120"/>
-              </a:rPr>
-              <a:t> draft script in 10 min. Rough storyboard. No filming yet.</a:t>
-            </a:r>
-            <a:endParaRPr lang="en-US" sz="1200" dirty="0"/>
-          </a:p>
-          <a:p>
-            <a:pPr algn="l" marL="342900" indent="-342900">
-              <a:lnSpc>
-                <a:spcPts val="1620"/>
-              </a:lnSpc>
-              <a:spcAft>
-                <a:spcPts val="300"/>
-              </a:spcAft>
-              <a:buSzPct val="100000"/>
-              <a:buChar char="•"/>
-            </a:pPr>
-            <a:r>
-              <a:rPr lang="en-US" sz="1200" b="1" dirty="0">
-                <a:solidFill>
-                  <a:srgbClr val="1C2833"/>
-                </a:solidFill>
-                <a:latin typeface="Arial" pitchFamily="34" charset="0"/>
-                <a:ea typeface="Arial" pitchFamily="34" charset="-122"/>
-                <a:cs typeface="Arial" pitchFamily="34" charset="-120"/>
-              </a:rPr>
-              <a:t>Workbook projects:</a:t>
-            </a:r>
-            <a:pPr algn="l" indent="0" marL="0">
-              <a:lnSpc>
-                <a:spcPts val="1620"/>
-              </a:lnSpc>
-              <a:spcAft>
-                <a:spcPts val="300"/>
-              </a:spcAft>
-              <a:buNone/>
-            </a:pPr>
-            <a:r>
-              <a:rPr lang="en-US" sz="1200" dirty="0">
-                <a:solidFill>
-                  <a:srgbClr val="1C2833"/>
-                </a:solidFill>
-                <a:latin typeface="Arial" pitchFamily="34" charset="0"/>
-                <a:ea typeface="Arial" pitchFamily="34" charset="-122"/>
-                <a:cs typeface="Arial" pitchFamily="34" charset="-120"/>
-              </a:rPr>
-              <a:t> draft 5 problems with worked dot-method solutions.</a:t>
-            </a:r>
-            <a:endParaRPr lang="en-US" sz="1200" dirty="0"/>
-          </a:p>
-          <a:p>
-            <a:pPr algn="l" marL="342900" indent="-342900">
-              <a:lnSpc>
-                <a:spcPts val="1620"/>
-              </a:lnSpc>
-              <a:spcAft>
-                <a:spcPts val="300"/>
-              </a:spcAft>
-              <a:buSzPct val="100000"/>
-              <a:buChar char="•"/>
-            </a:pPr>
-            <a:r>
-              <a:rPr lang="en-US" sz="1200" b="1" dirty="0">
-                <a:solidFill>
-                  <a:srgbClr val="1C2833"/>
-                </a:solidFill>
-                <a:latin typeface="Arial" pitchFamily="34" charset="0"/>
-                <a:ea typeface="Arial" pitchFamily="34" charset="-122"/>
-                <a:cs typeface="Arial" pitchFamily="34" charset="-120"/>
-              </a:rPr>
-              <a:t>Data projects:</a:t>
-            </a:r>
-            <a:pPr algn="l" indent="0" marL="0">
-              <a:lnSpc>
-                <a:spcPts val="1620"/>
-              </a:lnSpc>
-              <a:spcAft>
-                <a:spcPts val="300"/>
-              </a:spcAft>
-              <a:buNone/>
-            </a:pPr>
-            <a:r>
-              <a:rPr lang="en-US" sz="1200" dirty="0">
-                <a:solidFill>
-                  <a:srgbClr val="1C2833"/>
-                </a:solidFill>
-                <a:latin typeface="Arial" pitchFamily="34" charset="0"/>
-                <a:ea typeface="Arial" pitchFamily="34" charset="-122"/>
-                <a:cs typeface="Arial" pitchFamily="34" charset="-120"/>
-              </a:rPr>
-              <a:t> collect baseline times from 3 family members or schoolmates (in school: use classmates). Record in a table.</a:t>
-            </a:r>
-            <a:endParaRPr lang="en-US" sz="1200" dirty="0"/>
-          </a:p>
-        </p:txBody>
-      </p:sp>
-      <p:sp>
-        <p:nvSpPr>
-          <p:cNvPr id="8" name="Text 6"/>
-          <p:cNvSpPr/>
-          <p:nvPr/>
-        </p:nvSpPr>
-        <p:spPr>
-          <a:xfrm>
-            <a:off x="406301" y="3242518"/>
-            <a:ext cx="8498026" cy="213271"/>
-          </a:xfrm>
-          <a:prstGeom prst="rect">
-            <a:avLst/>
-          </a:prstGeom>
-          <a:noFill/>
-          <a:ln/>
-        </p:spPr>
-        <p:txBody>
-          <a:bodyPr wrap="square" lIns="0" tIns="0" rIns="0" bIns="0" rtlCol="0" anchor="t"/>
-          <a:lstStyle/>
-          <a:p>
-            <a:pPr algn="l" indent="0" marL="0">
-              <a:lnSpc>
-                <a:spcPts val="1680"/>
-              </a:lnSpc>
-              <a:spcBef>
-                <a:spcPts val="300"/>
-              </a:spcBef>
-              <a:spcAft>
-                <a:spcPts val="300"/>
-              </a:spcAft>
-              <a:buNone/>
-            </a:pPr>
-            <a:r>
-              <a:rPr lang="en-US" sz="1200" b="1" dirty="0">
-                <a:solidFill>
-                  <a:srgbClr val="1C2833"/>
-                </a:solidFill>
-                <a:latin typeface="Arial" pitchFamily="34" charset="0"/>
-                <a:ea typeface="Arial" pitchFamily="34" charset="-122"/>
-                <a:cs typeface="Arial" pitchFamily="34" charset="-120"/>
-              </a:rPr>
-              <a:t>Sprint 3 (10 min) — Build / iterate.</a:t>
-            </a:r>
-            <a:pPr algn="l" indent="0" marL="0">
-              <a:lnSpc>
-                <a:spcPts val="1680"/>
-              </a:lnSpc>
-              <a:spcBef>
-                <a:spcPts val="300"/>
-              </a:spcBef>
-              <a:spcAft>
-                <a:spcPts val="300"/>
-              </a:spcAft>
-              <a:buNone/>
-            </a:pPr>
-            <a:r>
-              <a:rPr lang="en-US" sz="1200" dirty="0">
-                <a:solidFill>
-                  <a:srgbClr val="1C2833"/>
-                </a:solidFill>
-                <a:latin typeface="Arial" pitchFamily="34" charset="0"/>
-                <a:ea typeface="Arial" pitchFamily="34" charset="-122"/>
-                <a:cs typeface="Arial" pitchFamily="34" charset="-120"/>
-              </a:rPr>
-              <a:t> Continue.</a:t>
-            </a:r>
-            <a:endParaRPr lang="en-US" sz="1200" dirty="0"/>
-          </a:p>
-        </p:txBody>
-      </p:sp>
-      <p:sp>
-        <p:nvSpPr>
-          <p:cNvPr id="9" name="Text 7"/>
-          <p:cNvSpPr/>
-          <p:nvPr/>
-        </p:nvSpPr>
-        <p:spPr>
-          <a:xfrm>
-            <a:off x="406301" y="3531989"/>
-            <a:ext cx="8498026" cy="639812"/>
-          </a:xfrm>
-          <a:prstGeom prst="rect">
-            <a:avLst/>
-          </a:prstGeom>
-          <a:noFill/>
-          <a:ln/>
-        </p:spPr>
-        <p:txBody>
-          <a:bodyPr wrap="square" lIns="0" tIns="0" rIns="0" bIns="0" rtlCol="0" anchor="t"/>
-          <a:lstStyle/>
-          <a:p>
-            <a:pPr algn="l" indent="0" marL="0">
-              <a:lnSpc>
-                <a:spcPts val="1680"/>
-              </a:lnSpc>
-              <a:spcBef>
-                <a:spcPts val="300"/>
-              </a:spcBef>
-              <a:spcAft>
-                <a:spcPts val="300"/>
-              </a:spcAft>
-              <a:buNone/>
-            </a:pPr>
-            <a:r>
-              <a:rPr lang="en-US" sz="1200" dirty="0">
-                <a:solidFill>
-                  <a:srgbClr val="1C2833"/>
-                </a:solidFill>
-                <a:latin typeface="Arial" pitchFamily="34" charset="0"/>
-                <a:ea typeface="Arial" pitchFamily="34" charset="-122"/>
-                <a:cs typeface="Arial" pitchFamily="34" charset="-120"/>
-              </a:rPr>
-              <a:t>Teacher's role: – 60-sec rotation per pair in Sprint 2. – Force a "stop planning, start producing" intervention for any pair still drafting their plan in Sprint 2. – For video projects: confirm by Sprint 3 that they have a clear shot list, not just a script. – For data projects: confirm by Sprint 3 that they have at least 3 real data points.</a:t>
-            </a:r>
-            <a:endParaRPr lang="en-US" sz="1200" dirty="0"/>
-          </a:p>
-        </p:txBody>
-      </p:sp>
-      <p:sp>
-        <p:nvSpPr>
-          <p:cNvPr id="10" name="Text 8"/>
+          <p:cNvPr id="5" name="Text 3"/>
           <p:cNvSpPr/>
           <p:nvPr/>
         </p:nvSpPr>
@@ -3969,7 +4933,7 @@
                 <a:ea typeface="Georgia" pitchFamily="34" charset="-122"/>
                 <a:cs typeface="Georgia" pitchFamily="34" charset="-120"/>
               </a:rPr>
-              <a:t>Wrap-up (5 min)</a:t>
+              <a:t>Core (35 min) — Workshop sprints</a:t>
             </a:r>
             <a:endParaRPr lang="en-US" sz="1800" dirty="0"/>
           </a:p>
@@ -3984,7 +4948,7 @@
         <p:spPr>
           <a:xfrm>
             <a:off x="406301" y="870942"/>
-            <a:ext cx="8498026" cy="426541"/>
+            <a:ext cx="8498026" cy="213271"/>
           </a:xfrm>
           <a:prstGeom prst="rect">
             <a:avLst/>
@@ -4017,7 +4981,7 @@
                 <a:ea typeface="Arial" pitchFamily="34" charset="-122"/>
                 <a:cs typeface="Arial" pitchFamily="34" charset="-120"/>
               </a:rPr>
-              <a:t>– 30-sec share-out from 4 pairs (you call them). – Plan paragraph submitted at the door. – Preview Day 9: refine and rehearse.</a:t>
+              <a:t>Same three-sprint structure as Panchabhuta Day 8:</a:t>
             </a:r>
             <a:endParaRPr lang="en-US" sz="1200" dirty="0"/>
           </a:p>
@@ -4026,6 +4990,219 @@
       <p:sp>
         <p:nvSpPr>
           <p:cNvPr id="5" name="Text 3"/>
+          <p:cNvSpPr/>
+          <p:nvPr/>
+        </p:nvSpPr>
+        <p:spPr>
+          <a:xfrm>
+            <a:off x="406301" y="1160413"/>
+            <a:ext cx="8498026" cy="213271"/>
+          </a:xfrm>
+          <a:prstGeom prst="rect">
+            <a:avLst/>
+          </a:prstGeom>
+          <a:noFill/>
+          <a:ln/>
+        </p:spPr>
+        <p:txBody>
+          <a:bodyPr wrap="square" lIns="0" tIns="0" rIns="0" bIns="0" rtlCol="0" anchor="t"/>
+          <a:lstStyle/>
+          <a:p>
+            <a:pPr algn="l" indent="0" marL="0">
+              <a:lnSpc>
+                <a:spcPts val="1680"/>
+              </a:lnSpc>
+              <a:spcBef>
+                <a:spcPts val="300"/>
+              </a:spcBef>
+              <a:spcAft>
+                <a:spcPts val="300"/>
+              </a:spcAft>
+              <a:buNone/>
+            </a:pPr>
+            <a:r>
+              <a:rPr lang="en-US" sz="1200" b="1" dirty="0">
+                <a:solidFill>
+                  <a:srgbClr val="1C2833"/>
+                </a:solidFill>
+                <a:latin typeface="Arial" pitchFamily="34" charset="0"/>
+                <a:ea typeface="Arial" pitchFamily="34" charset="-122"/>
+                <a:cs typeface="Arial" pitchFamily="34" charset="-120"/>
+              </a:rPr>
+              <a:t>Sprint 1 (10 min) — Plan completion.</a:t>
+            </a:r>
+            <a:pPr algn="l" indent="0" marL="0">
+              <a:lnSpc>
+                <a:spcPts val="1680"/>
+              </a:lnSpc>
+              <a:spcBef>
+                <a:spcPts val="300"/>
+              </a:spcBef>
+              <a:spcAft>
+                <a:spcPts val="300"/>
+              </a:spcAft>
+              <a:buNone/>
+            </a:pPr>
+            <a:r>
+              <a:rPr lang="en-US" sz="1200" dirty="0">
+                <a:solidFill>
+                  <a:srgbClr val="1C2833"/>
+                </a:solidFill>
+                <a:latin typeface="Arial" pitchFamily="34" charset="0"/>
+                <a:ea typeface="Arial" pitchFamily="34" charset="-122"/>
+                <a:cs typeface="Arial" pitchFamily="34" charset="-120"/>
+              </a:rPr>
+              <a:t> Every pair finalises:</a:t>
+            </a:r>
+            <a:endParaRPr lang="en-US" sz="1200" dirty="0"/>
+          </a:p>
+        </p:txBody>
+      </p:sp>
+      <p:sp>
+        <p:nvSpPr>
+          <p:cNvPr id="6" name="Text 4"/>
+          <p:cNvSpPr/>
+          <p:nvPr/>
+        </p:nvSpPr>
+        <p:spPr>
+          <a:xfrm>
+            <a:off x="634901" y="1462534"/>
+            <a:ext cx="8102798" cy="1257002"/>
+          </a:xfrm>
+          <a:prstGeom prst="rect">
+            <a:avLst/>
+          </a:prstGeom>
+          <a:noFill/>
+          <a:ln/>
+        </p:spPr>
+        <p:txBody>
+          <a:bodyPr wrap="square" lIns="0" tIns="0" rIns="0" bIns="0" rtlCol="0" anchor="t"/>
+          <a:lstStyle/>
+          <a:p>
+            <a:pPr algn="l" marL="342900" indent="-342900">
+              <a:lnSpc>
+                <a:spcPts val="1620"/>
+              </a:lnSpc>
+              <a:spcAft>
+                <a:spcPts val="300"/>
+              </a:spcAft>
+              <a:buSzPct val="100000"/>
+              <a:buChar char="•"/>
+            </a:pPr>
+            <a:r>
+              <a:rPr lang="en-US" sz="1200" dirty="0">
+                <a:solidFill>
+                  <a:srgbClr val="1C2833"/>
+                </a:solidFill>
+                <a:latin typeface="Arial" pitchFamily="34" charset="0"/>
+                <a:ea typeface="Arial" pitchFamily="34" charset="-122"/>
+                <a:cs typeface="Arial" pitchFamily="34" charset="-120"/>
+              </a:rPr>
+              <a:t>Format (video / workbook / data project)</a:t>
+            </a:r>
+            <a:endParaRPr lang="en-US" sz="1200" dirty="0"/>
+          </a:p>
+          <a:p>
+            <a:pPr algn="l" marL="342900" indent="-342900">
+              <a:lnSpc>
+                <a:spcPts val="1620"/>
+              </a:lnSpc>
+              <a:spcAft>
+                <a:spcPts val="300"/>
+              </a:spcAft>
+              <a:buSzPct val="100000"/>
+              <a:buChar char="•"/>
+            </a:pPr>
+            <a:r>
+              <a:rPr lang="en-US" sz="1200" dirty="0">
+                <a:solidFill>
+                  <a:srgbClr val="1C2833"/>
+                </a:solidFill>
+                <a:latin typeface="Arial" pitchFamily="34" charset="0"/>
+                <a:ea typeface="Arial" pitchFamily="34" charset="-122"/>
+                <a:cs typeface="Arial" pitchFamily="34" charset="-120"/>
+              </a:rPr>
+              <a:t>One-sentence audience takeaway</a:t>
+            </a:r>
+            <a:endParaRPr lang="en-US" sz="1200" dirty="0"/>
+          </a:p>
+          <a:p>
+            <a:pPr algn="l" marL="342900" indent="-342900">
+              <a:lnSpc>
+                <a:spcPts val="1620"/>
+              </a:lnSpc>
+              <a:spcAft>
+                <a:spcPts val="300"/>
+              </a:spcAft>
+              <a:buSzPct val="100000"/>
+              <a:buChar char="•"/>
+            </a:pPr>
+            <a:r>
+              <a:rPr lang="en-US" sz="1200" dirty="0">
+                <a:solidFill>
+                  <a:srgbClr val="1C2833"/>
+                </a:solidFill>
+                <a:latin typeface="Arial" pitchFamily="34" charset="0"/>
+                <a:ea typeface="Arial" pitchFamily="34" charset="-122"/>
+                <a:cs typeface="Arial" pitchFamily="34" charset="-120"/>
+              </a:rPr>
+              <a:t>Three-part structure of the artefact</a:t>
+            </a:r>
+            <a:endParaRPr lang="en-US" sz="1200" dirty="0"/>
+          </a:p>
+          <a:p>
+            <a:pPr algn="l" marL="342900" indent="-342900">
+              <a:lnSpc>
+                <a:spcPts val="1620"/>
+              </a:lnSpc>
+              <a:spcAft>
+                <a:spcPts val="300"/>
+              </a:spcAft>
+              <a:buSzPct val="100000"/>
+              <a:buChar char="•"/>
+            </a:pPr>
+            <a:r>
+              <a:rPr lang="en-US" sz="1200" dirty="0">
+                <a:solidFill>
+                  <a:srgbClr val="1C2833"/>
+                </a:solidFill>
+                <a:latin typeface="Arial" pitchFamily="34" charset="0"/>
+                <a:ea typeface="Arial" pitchFamily="34" charset="-122"/>
+                <a:cs typeface="Arial" pitchFamily="34" charset="-120"/>
+              </a:rPr>
+              <a:t>Division of labour</a:t>
+            </a:r>
+            <a:endParaRPr lang="en-US" sz="1200" dirty="0"/>
+          </a:p>
+          <a:p>
+            <a:pPr algn="l" marL="342900" indent="-342900">
+              <a:lnSpc>
+                <a:spcPts val="1620"/>
+              </a:lnSpc>
+              <a:spcAft>
+                <a:spcPts val="300"/>
+              </a:spcAft>
+              <a:buSzPct val="100000"/>
+              <a:buChar char="•"/>
+            </a:pPr>
+            <a:r>
+              <a:rPr lang="en-US" sz="1200" dirty="0">
+                <a:solidFill>
+                  <a:srgbClr val="1C2833"/>
+                </a:solidFill>
+                <a:latin typeface="Arial" pitchFamily="34" charset="0"/>
+                <a:ea typeface="Arial" pitchFamily="34" charset="-122"/>
+                <a:cs typeface="Arial" pitchFamily="34" charset="-120"/>
+              </a:rPr>
+              <a:t>The PDF section they'll cite (e.g. "Vedic Mathematics Batch1.pdf, §5.4")</a:t>
+            </a:r>
+            <a:endParaRPr lang="en-US" sz="1200" dirty="0"/>
+          </a:p>
+        </p:txBody>
+      </p:sp>
+      <p:sp>
+        <p:nvSpPr>
+          <p:cNvPr id="7" name="Text 5"/>
           <p:cNvSpPr/>
           <p:nvPr/>
         </p:nvSpPr>
@@ -4175,7 +5352,7 @@
                 <a:ea typeface="Georgia" pitchFamily="34" charset="-122"/>
                 <a:cs typeface="Georgia" pitchFamily="34" charset="-120"/>
               </a:rPr>
-              <a:t>Student-facing content</a:t>
+              <a:t>Core (35 min) — Workshop sprints (cont.)</a:t>
             </a:r>
             <a:endParaRPr lang="en-US" sz="1800" dirty="0"/>
           </a:p>
@@ -4189,50 +5366,199 @@
         </p:nvSpPr>
         <p:spPr>
           <a:xfrm>
-            <a:off x="406301" y="883593"/>
-            <a:ext cx="8331398" cy="2688431"/>
-          </a:xfrm>
-          <a:prstGeom prst="rect">
-            <a:avLst/>
-          </a:prstGeom>
-          <a:solidFill>
-            <a:srgbClr val="F4F8F9"/>
-          </a:solidFill>
-          <a:ln/>
-        </p:spPr>
-        <p:txBody>
-          <a:bodyPr wrap="square" rtlCol="0" anchor="ctr"/>
-          <a:lstStyle/>
-          <a:p>
-            <a:pPr indent="0" marL="0">
-              <a:buNone/>
-            </a:pPr>
-            <a:endParaRPr lang="en-US" dirty="0"/>
-          </a:p>
-        </p:txBody>
-      </p:sp>
-      <p:sp>
-        <p:nvSpPr>
-          <p:cNvPr id="5" name="Shape 3"/>
-          <p:cNvSpPr/>
-          <p:nvPr/>
-        </p:nvSpPr>
-        <p:spPr>
-          <a:xfrm>
-            <a:off x="434876" y="883593"/>
-            <a:ext cx="0" cy="2688431"/>
-          </a:xfrm>
-          <a:prstGeom prst="line">
+            <a:off x="406301" y="870942"/>
+            <a:ext cx="8498026" cy="213271"/>
+          </a:xfrm>
+          <a:prstGeom prst="rect">
             <a:avLst/>
           </a:prstGeom>
           <a:noFill/>
-          <a:ln w="57150">
-            <a:solidFill>
-              <a:srgbClr val="FE4447"/>
-            </a:solidFill>
-            <a:prstDash val="solid"/>
-          </a:ln>
-        </p:spPr>
+          <a:ln/>
+        </p:spPr>
+        <p:txBody>
+          <a:bodyPr wrap="square" lIns="0" tIns="0" rIns="0" bIns="0" rtlCol="0" anchor="t"/>
+          <a:lstStyle/>
+          <a:p>
+            <a:pPr algn="l" indent="0" marL="0">
+              <a:lnSpc>
+                <a:spcPts val="1680"/>
+              </a:lnSpc>
+              <a:spcBef>
+                <a:spcPts val="300"/>
+              </a:spcBef>
+              <a:spcAft>
+                <a:spcPts val="300"/>
+              </a:spcAft>
+              <a:buNone/>
+            </a:pPr>
+            <a:r>
+              <a:rPr lang="en-US" sz="1200" b="1" dirty="0">
+                <a:solidFill>
+                  <a:srgbClr val="1C2833"/>
+                </a:solidFill>
+                <a:latin typeface="Arial" pitchFamily="34" charset="0"/>
+                <a:ea typeface="Arial" pitchFamily="34" charset="-122"/>
+                <a:cs typeface="Arial" pitchFamily="34" charset="-120"/>
+              </a:rPr>
+              <a:t>Sprint 2 (10 min) — First artefact.</a:t>
+            </a:r>
+            <a:endParaRPr lang="en-US" sz="1200" dirty="0"/>
+          </a:p>
+        </p:txBody>
+      </p:sp>
+      <p:sp>
+        <p:nvSpPr>
+          <p:cNvPr id="5" name="Text 3"/>
+          <p:cNvSpPr/>
+          <p:nvPr/>
+        </p:nvSpPr>
+        <p:spPr>
+          <a:xfrm>
+            <a:off x="634901" y="1173063"/>
+            <a:ext cx="8102798" cy="975122"/>
+          </a:xfrm>
+          <a:prstGeom prst="rect">
+            <a:avLst/>
+          </a:prstGeom>
+          <a:noFill/>
+          <a:ln/>
+        </p:spPr>
+        <p:txBody>
+          <a:bodyPr wrap="square" lIns="0" tIns="0" rIns="0" bIns="0" rtlCol="0" anchor="t"/>
+          <a:lstStyle/>
+          <a:p>
+            <a:pPr algn="l" marL="342900" indent="-342900">
+              <a:lnSpc>
+                <a:spcPts val="1620"/>
+              </a:lnSpc>
+              <a:spcAft>
+                <a:spcPts val="300"/>
+              </a:spcAft>
+              <a:buSzPct val="100000"/>
+              <a:buChar char="•"/>
+            </a:pPr>
+            <a:r>
+              <a:rPr lang="en-US" sz="1200" b="1" dirty="0">
+                <a:solidFill>
+                  <a:srgbClr val="1C2833"/>
+                </a:solidFill>
+                <a:latin typeface="Arial" pitchFamily="34" charset="0"/>
+                <a:ea typeface="Arial" pitchFamily="34" charset="-122"/>
+                <a:cs typeface="Arial" pitchFamily="34" charset="-120"/>
+              </a:rPr>
+              <a:t>Video projects:</a:t>
+            </a:r>
+            <a:pPr algn="l" indent="0" marL="0">
+              <a:lnSpc>
+                <a:spcPts val="1620"/>
+              </a:lnSpc>
+              <a:spcAft>
+                <a:spcPts val="300"/>
+              </a:spcAft>
+              <a:buNone/>
+            </a:pPr>
+            <a:r>
+              <a:rPr lang="en-US" sz="1200" dirty="0">
+                <a:solidFill>
+                  <a:srgbClr val="1C2833"/>
+                </a:solidFill>
+                <a:latin typeface="Arial" pitchFamily="34" charset="0"/>
+                <a:ea typeface="Arial" pitchFamily="34" charset="-122"/>
+                <a:cs typeface="Arial" pitchFamily="34" charset="-120"/>
+              </a:rPr>
+              <a:t> draft script in 10 min. Rough storyboard. No filming yet.</a:t>
+            </a:r>
+            <a:endParaRPr lang="en-US" sz="1200" dirty="0"/>
+          </a:p>
+          <a:p>
+            <a:pPr algn="l" marL="342900" indent="-342900">
+              <a:lnSpc>
+                <a:spcPts val="1620"/>
+              </a:lnSpc>
+              <a:spcAft>
+                <a:spcPts val="300"/>
+              </a:spcAft>
+              <a:buSzPct val="100000"/>
+              <a:buChar char="•"/>
+            </a:pPr>
+            <a:r>
+              <a:rPr lang="en-US" sz="1200" b="1" dirty="0">
+                <a:solidFill>
+                  <a:srgbClr val="1C2833"/>
+                </a:solidFill>
+                <a:latin typeface="Arial" pitchFamily="34" charset="0"/>
+                <a:ea typeface="Arial" pitchFamily="34" charset="-122"/>
+                <a:cs typeface="Arial" pitchFamily="34" charset="-120"/>
+              </a:rPr>
+              <a:t>Workbook projects:</a:t>
+            </a:r>
+            <a:pPr algn="l" indent="0" marL="0">
+              <a:lnSpc>
+                <a:spcPts val="1620"/>
+              </a:lnSpc>
+              <a:spcAft>
+                <a:spcPts val="300"/>
+              </a:spcAft>
+              <a:buNone/>
+            </a:pPr>
+            <a:r>
+              <a:rPr lang="en-US" sz="1200" dirty="0">
+                <a:solidFill>
+                  <a:srgbClr val="1C2833"/>
+                </a:solidFill>
+                <a:latin typeface="Arial" pitchFamily="34" charset="0"/>
+                <a:ea typeface="Arial" pitchFamily="34" charset="-122"/>
+                <a:cs typeface="Arial" pitchFamily="34" charset="-120"/>
+              </a:rPr>
+              <a:t> draft 5 problems with worked dot-method solutions.</a:t>
+            </a:r>
+            <a:endParaRPr lang="en-US" sz="1200" dirty="0"/>
+          </a:p>
+          <a:p>
+            <a:pPr algn="l" marL="342900" indent="-342900">
+              <a:lnSpc>
+                <a:spcPts val="1620"/>
+              </a:lnSpc>
+              <a:spcAft>
+                <a:spcPts val="300"/>
+              </a:spcAft>
+              <a:buSzPct val="100000"/>
+              <a:buChar char="•"/>
+            </a:pPr>
+            <a:r>
+              <a:rPr lang="en-US" sz="1200" b="1" dirty="0">
+                <a:solidFill>
+                  <a:srgbClr val="1C2833"/>
+                </a:solidFill>
+                <a:latin typeface="Arial" pitchFamily="34" charset="0"/>
+                <a:ea typeface="Arial" pitchFamily="34" charset="-122"/>
+                <a:cs typeface="Arial" pitchFamily="34" charset="-120"/>
+              </a:rPr>
+              <a:t>Data projects:</a:t>
+            </a:r>
+            <a:pPr algn="l" indent="0" marL="0">
+              <a:lnSpc>
+                <a:spcPts val="1620"/>
+              </a:lnSpc>
+              <a:spcAft>
+                <a:spcPts val="300"/>
+              </a:spcAft>
+              <a:buNone/>
+            </a:pPr>
+            <a:r>
+              <a:rPr lang="en-US" sz="1200" dirty="0">
+                <a:solidFill>
+                  <a:srgbClr val="1C2833"/>
+                </a:solidFill>
+                <a:latin typeface="Arial" pitchFamily="34" charset="0"/>
+                <a:ea typeface="Arial" pitchFamily="34" charset="-122"/>
+                <a:cs typeface="Arial" pitchFamily="34" charset="-120"/>
+              </a:rPr>
+              <a:t> collect baseline times from 3 family members or schoolmates (in school: use classmates). Record in a table.</a:t>
+            </a:r>
+            <a:endParaRPr lang="en-US" sz="1200" dirty="0"/>
+          </a:p>
+        </p:txBody>
       </p:sp>
       <p:sp>
         <p:nvSpPr>
@@ -4242,8 +5568,8 @@
         </p:nvSpPr>
         <p:spPr>
           <a:xfrm>
-            <a:off x="692051" y="1074093"/>
-            <a:ext cx="7973389" cy="230981"/>
+            <a:off x="406301" y="2237036"/>
+            <a:ext cx="8498026" cy="213271"/>
           </a:xfrm>
           <a:prstGeom prst="rect">
             <a:avLst/>
@@ -4257,7 +5583,7 @@
           <a:p>
             <a:pPr algn="l" indent="0" marL="0">
               <a:lnSpc>
-                <a:spcPts val="1820"/>
+                <a:spcPts val="1680"/>
               </a:lnSpc>
               <a:spcBef>
                 <a:spcPts val="300"/>
@@ -4268,261 +5594,46 @@
               <a:buNone/>
             </a:pPr>
             <a:r>
-              <a:rPr lang="en-US" sz="1300" b="1" i="1" dirty="0">
-                <a:solidFill>
-                  <a:srgbClr val="1C2833"/>
-                </a:solidFill>
-                <a:latin typeface="Georgia" pitchFamily="34" charset="0"/>
-                <a:ea typeface="Georgia" pitchFamily="34" charset="-122"/>
-                <a:cs typeface="Georgia" pitchFamily="34" charset="-120"/>
-              </a:rPr>
-              <a:t>Project workshop — Session 1</a:t>
-            </a:r>
-            <a:endParaRPr lang="en-US" sz="1300" dirty="0"/>
+              <a:rPr lang="en-US" sz="1200" b="1" dirty="0">
+                <a:solidFill>
+                  <a:srgbClr val="1C2833"/>
+                </a:solidFill>
+                <a:latin typeface="Arial" pitchFamily="34" charset="0"/>
+                <a:ea typeface="Arial" pitchFamily="34" charset="-122"/>
+                <a:cs typeface="Arial" pitchFamily="34" charset="-120"/>
+              </a:rPr>
+              <a:t>Sprint 3 (10 min) — Build / iterate.</a:t>
+            </a:r>
+            <a:pPr algn="l" indent="0" marL="0">
+              <a:lnSpc>
+                <a:spcPts val="1680"/>
+              </a:lnSpc>
+              <a:spcBef>
+                <a:spcPts val="300"/>
+              </a:spcBef>
+              <a:spcAft>
+                <a:spcPts val="300"/>
+              </a:spcAft>
+              <a:buNone/>
+            </a:pPr>
+            <a:r>
+              <a:rPr lang="en-US" sz="1200" dirty="0">
+                <a:solidFill>
+                  <a:srgbClr val="1C2833"/>
+                </a:solidFill>
+                <a:latin typeface="Arial" pitchFamily="34" charset="0"/>
+                <a:ea typeface="Arial" pitchFamily="34" charset="-122"/>
+                <a:cs typeface="Arial" pitchFamily="34" charset="-120"/>
+              </a:rPr>
+              <a:t> Continue.</a:t>
+            </a:r>
+            <a:endParaRPr lang="en-US" sz="1200" dirty="0"/>
           </a:p>
         </p:txBody>
       </p:sp>
       <p:sp>
         <p:nvSpPr>
           <p:cNvPr id="7" name="Text 5"/>
-          <p:cNvSpPr/>
-          <p:nvPr/>
-        </p:nvSpPr>
-        <p:spPr>
-          <a:xfrm>
-            <a:off x="692051" y="1343174"/>
-            <a:ext cx="7973389" cy="230981"/>
-          </a:xfrm>
-          <a:prstGeom prst="rect">
-            <a:avLst/>
-          </a:prstGeom>
-          <a:noFill/>
-          <a:ln/>
-        </p:spPr>
-        <p:txBody>
-          <a:bodyPr wrap="square" lIns="0" tIns="0" rIns="0" bIns="0" rtlCol="0" anchor="t"/>
-          <a:lstStyle/>
-          <a:p>
-            <a:pPr algn="l" indent="0" marL="0">
-              <a:lnSpc>
-                <a:spcPts val="1820"/>
-              </a:lnSpc>
-              <a:spcBef>
-                <a:spcPts val="300"/>
-              </a:spcBef>
-              <a:spcAft>
-                <a:spcPts val="300"/>
-              </a:spcAft>
-              <a:buNone/>
-            </a:pPr>
-            <a:r>
-              <a:rPr lang="en-US" sz="1300" i="1" dirty="0">
-                <a:solidFill>
-                  <a:srgbClr val="1C2833"/>
-                </a:solidFill>
-                <a:latin typeface="Georgia" pitchFamily="34" charset="0"/>
-                <a:ea typeface="Georgia" pitchFamily="34" charset="-122"/>
-                <a:cs typeface="Georgia" pitchFamily="34" charset="-120"/>
-              </a:rPr>
-              <a:t>By end of class, your pair should have:</a:t>
-            </a:r>
-            <a:endParaRPr lang="en-US" sz="1300" dirty="0"/>
-          </a:p>
-        </p:txBody>
-      </p:sp>
-      <p:sp>
-        <p:nvSpPr>
-          <p:cNvPr id="8" name="Text 6"/>
-          <p:cNvSpPr/>
-          <p:nvPr/>
-        </p:nvSpPr>
-        <p:spPr>
-          <a:xfrm>
-            <a:off x="692051" y="1612255"/>
-            <a:ext cx="7973389" cy="461963"/>
-          </a:xfrm>
-          <a:prstGeom prst="rect">
-            <a:avLst/>
-          </a:prstGeom>
-          <a:noFill/>
-          <a:ln/>
-        </p:spPr>
-        <p:txBody>
-          <a:bodyPr wrap="square" lIns="0" tIns="0" rIns="0" bIns="0" rtlCol="0" anchor="t"/>
-          <a:lstStyle/>
-          <a:p>
-            <a:pPr algn="l" indent="0" marL="0">
-              <a:lnSpc>
-                <a:spcPts val="1820"/>
-              </a:lnSpc>
-              <a:spcBef>
-                <a:spcPts val="300"/>
-              </a:spcBef>
-              <a:spcAft>
-                <a:spcPts val="300"/>
-              </a:spcAft>
-              <a:buNone/>
-            </a:pPr>
-            <a:r>
-              <a:rPr lang="en-US" sz="1300" i="1" dirty="0">
-                <a:solidFill>
-                  <a:srgbClr val="1C2833"/>
-                </a:solidFill>
-                <a:latin typeface="Georgia" pitchFamily="34" charset="0"/>
-                <a:ea typeface="Georgia" pitchFamily="34" charset="-122"/>
-                <a:cs typeface="Georgia" pitchFamily="34" charset="-120"/>
-              </a:rPr>
-              <a:t>1. A written project plan paragraph. 2. The start of your artefact: a script draft, 5 worked problems, OR 3 data points.</a:t>
-            </a:r>
-            <a:endParaRPr lang="en-US" sz="1300" dirty="0"/>
-          </a:p>
-        </p:txBody>
-      </p:sp>
-      <p:sp>
-        <p:nvSpPr>
-          <p:cNvPr id="9" name="Text 7"/>
-          <p:cNvSpPr/>
-          <p:nvPr/>
-        </p:nvSpPr>
-        <p:spPr>
-          <a:xfrm>
-            <a:off x="692051" y="2112318"/>
-            <a:ext cx="7973389" cy="230981"/>
-          </a:xfrm>
-          <a:prstGeom prst="rect">
-            <a:avLst/>
-          </a:prstGeom>
-          <a:noFill/>
-          <a:ln/>
-        </p:spPr>
-        <p:txBody>
-          <a:bodyPr wrap="square" lIns="0" tIns="0" rIns="0" bIns="0" rtlCol="0" anchor="t"/>
-          <a:lstStyle/>
-          <a:p>
-            <a:pPr algn="l" indent="0" marL="0">
-              <a:lnSpc>
-                <a:spcPts val="1820"/>
-              </a:lnSpc>
-              <a:spcBef>
-                <a:spcPts val="300"/>
-              </a:spcBef>
-              <a:spcAft>
-                <a:spcPts val="300"/>
-              </a:spcAft>
-              <a:buNone/>
-            </a:pPr>
-            <a:r>
-              <a:rPr lang="en-US" sz="1300" i="1" dirty="0">
-                <a:solidFill>
-                  <a:srgbClr val="1C2833"/>
-                </a:solidFill>
-                <a:latin typeface="Georgia" pitchFamily="34" charset="0"/>
-                <a:ea typeface="Georgia" pitchFamily="34" charset="-122"/>
-                <a:cs typeface="Georgia" pitchFamily="34" charset="-120"/>
-              </a:rPr>
-              <a:t>Plan template:</a:t>
-            </a:r>
-            <a:endParaRPr lang="en-US" sz="1300" dirty="0"/>
-          </a:p>
-        </p:txBody>
-      </p:sp>
-      <p:sp>
-        <p:nvSpPr>
-          <p:cNvPr id="10" name="Text 8"/>
-          <p:cNvSpPr/>
-          <p:nvPr/>
-        </p:nvSpPr>
-        <p:spPr>
-          <a:xfrm>
-            <a:off x="692051" y="2381399"/>
-            <a:ext cx="7973389" cy="1000125"/>
-          </a:xfrm>
-          <a:prstGeom prst="rect">
-            <a:avLst/>
-          </a:prstGeom>
-          <a:noFill/>
-          <a:ln/>
-        </p:spPr>
-        <p:txBody>
-          <a:bodyPr wrap="square" lIns="0" tIns="0" rIns="0" bIns="0" rtlCol="0" anchor="t"/>
-          <a:lstStyle/>
-          <a:p>
-            <a:pPr algn="l" indent="0" marL="0">
-              <a:lnSpc>
-                <a:spcPts val="1820"/>
-              </a:lnSpc>
-              <a:spcBef>
-                <a:spcPts val="300"/>
-              </a:spcBef>
-              <a:spcAft>
-                <a:spcPts val="300"/>
-              </a:spcAft>
-              <a:buNone/>
-            </a:pPr>
-            <a:r>
-              <a:rPr lang="en-US" sz="1300" dirty="0">
-                <a:solidFill>
-                  <a:srgbClr val="1C2833"/>
-                </a:solidFill>
-                <a:latin typeface="Georgia" pitchFamily="34" charset="0"/>
-                <a:ea typeface="Georgia" pitchFamily="34" charset="-122"/>
-                <a:cs typeface="Georgia" pitchFamily="34" charset="-120"/>
-              </a:rPr>
-              <a:t>``</a:t>
-            </a:r>
-            <a:pPr algn="l" indent="0" marL="0">
-              <a:lnSpc>
-                <a:spcPts val="1820"/>
-              </a:lnSpc>
-              <a:spcBef>
-                <a:spcPts val="300"/>
-              </a:spcBef>
-              <a:spcAft>
-                <a:spcPts val="300"/>
-              </a:spcAft>
-              <a:buNone/>
-            </a:pPr>
-            <a:r>
-              <a:rPr lang="en-US" sz="1300" i="1" dirty="0">
-                <a:solidFill>
-                  <a:srgbClr val="1C2833"/>
-                </a:solidFill>
-                <a:latin typeface="Georgia" pitchFamily="34" charset="0"/>
-                <a:ea typeface="Georgia" pitchFamily="34" charset="-122"/>
-                <a:cs typeface="Georgia" pitchFamily="34" charset="-120"/>
-              </a:rPr>
-              <a:t> Format: __________ (video / workbook / data project) Audience walks away thinking: __________ Structure (3 parts): 1. __________ 2. __________ 3. __________ Division of labour (Partner A): __________ Division of labour (Partner B): __________ Source we'll cite: __________ (PDF + section)</a:t>
-            </a:r>
-            <a:pPr algn="l" indent="0" marL="0">
-              <a:lnSpc>
-                <a:spcPts val="1820"/>
-              </a:lnSpc>
-              <a:spcBef>
-                <a:spcPts val="300"/>
-              </a:spcBef>
-              <a:spcAft>
-                <a:spcPts val="300"/>
-              </a:spcAft>
-              <a:buNone/>
-            </a:pPr>
-            <a:r>
-              <a:rPr lang="en-US" sz="1300" dirty="0">
-                <a:solidFill>
-                  <a:srgbClr val="1C2833"/>
-                </a:solidFill>
-                <a:latin typeface="Georgia" pitchFamily="34" charset="0"/>
-                <a:ea typeface="Georgia" pitchFamily="34" charset="-122"/>
-                <a:cs typeface="Georgia" pitchFamily="34" charset="-120"/>
-              </a:rPr>
-              <a:t>``</a:t>
-            </a:r>
-            <a:endParaRPr lang="en-US" sz="1300" dirty="0"/>
-          </a:p>
-        </p:txBody>
-      </p:sp>
-      <p:sp>
-        <p:nvSpPr>
-          <p:cNvPr id="11" name="Text 9"/>
           <p:cNvSpPr/>
           <p:nvPr/>
         </p:nvSpPr>
@@ -4672,7 +5783,7 @@
                 <a:ea typeface="Georgia" pitchFamily="34" charset="-122"/>
                 <a:cs typeface="Georgia" pitchFamily="34" charset="-120"/>
               </a:rPr>
-              <a:t>Homework</a:t>
+              <a:t>Core (35 min) — Workshop sprints (cont.)</a:t>
             </a:r>
             <a:endParaRPr lang="en-US" sz="1800" dirty="0"/>
           </a:p>
@@ -4720,7 +5831,7 @@
                 <a:ea typeface="Arial" pitchFamily="34" charset="-122"/>
                 <a:cs typeface="Arial" pitchFamily="34" charset="-120"/>
               </a:rPr>
-              <a:t>– Whatever didn't get done in class — finish at home tonight.</a:t>
+              <a:t>Teacher's role:</a:t>
             </a:r>
             <a:endParaRPr lang="en-US" sz="1200" dirty="0"/>
           </a:p>
@@ -4729,6 +5840,124 @@
       <p:sp>
         <p:nvSpPr>
           <p:cNvPr id="5" name="Text 3"/>
+          <p:cNvSpPr/>
+          <p:nvPr/>
+        </p:nvSpPr>
+        <p:spPr>
+          <a:xfrm>
+            <a:off x="634901" y="1173063"/>
+            <a:ext cx="8102798" cy="1013222"/>
+          </a:xfrm>
+          <a:prstGeom prst="rect">
+            <a:avLst/>
+          </a:prstGeom>
+          <a:noFill/>
+          <a:ln/>
+        </p:spPr>
+        <p:txBody>
+          <a:bodyPr wrap="square" lIns="0" tIns="0" rIns="0" bIns="0" rtlCol="0" anchor="t"/>
+          <a:lstStyle/>
+          <a:p>
+            <a:pPr algn="l" marL="342900" indent="-342900">
+              <a:lnSpc>
+                <a:spcPts val="1620"/>
+              </a:lnSpc>
+              <a:spcAft>
+                <a:spcPts val="300"/>
+              </a:spcAft>
+              <a:buSzPct val="100000"/>
+              <a:buChar char="•"/>
+            </a:pPr>
+            <a:r>
+              <a:rPr lang="en-US" sz="1200" dirty="0">
+                <a:solidFill>
+                  <a:srgbClr val="1C2833"/>
+                </a:solidFill>
+                <a:latin typeface="Arial" pitchFamily="34" charset="0"/>
+                <a:ea typeface="Arial" pitchFamily="34" charset="-122"/>
+                <a:cs typeface="Arial" pitchFamily="34" charset="-120"/>
+              </a:rPr>
+              <a:t>60-sec rotation per pair in Sprint 2.</a:t>
+            </a:r>
+            <a:endParaRPr lang="en-US" sz="1200" dirty="0"/>
+          </a:p>
+          <a:p>
+            <a:pPr algn="l" marL="342900" indent="-342900">
+              <a:lnSpc>
+                <a:spcPts val="1620"/>
+              </a:lnSpc>
+              <a:spcAft>
+                <a:spcPts val="300"/>
+              </a:spcAft>
+              <a:buSzPct val="100000"/>
+              <a:buChar char="•"/>
+            </a:pPr>
+            <a:r>
+              <a:rPr lang="en-US" sz="1200" dirty="0">
+                <a:solidFill>
+                  <a:srgbClr val="1C2833"/>
+                </a:solidFill>
+                <a:latin typeface="Arial" pitchFamily="34" charset="0"/>
+                <a:ea typeface="Arial" pitchFamily="34" charset="-122"/>
+                <a:cs typeface="Arial" pitchFamily="34" charset="-120"/>
+              </a:rPr>
+              <a:t>Force a "stop planning, start producing" intervention for any pair still drafting their plan in Sprint 2.</a:t>
+            </a:r>
+            <a:endParaRPr lang="en-US" sz="1200" dirty="0"/>
+          </a:p>
+          <a:p>
+            <a:pPr algn="l" marL="342900" indent="-342900">
+              <a:lnSpc>
+                <a:spcPts val="1620"/>
+              </a:lnSpc>
+              <a:spcAft>
+                <a:spcPts val="300"/>
+              </a:spcAft>
+              <a:buSzPct val="100000"/>
+              <a:buChar char="•"/>
+            </a:pPr>
+            <a:r>
+              <a:rPr lang="en-US" sz="1200" dirty="0">
+                <a:solidFill>
+                  <a:srgbClr val="1C2833"/>
+                </a:solidFill>
+                <a:latin typeface="Arial" pitchFamily="34" charset="0"/>
+                <a:ea typeface="Arial" pitchFamily="34" charset="-122"/>
+                <a:cs typeface="Arial" pitchFamily="34" charset="-120"/>
+              </a:rPr>
+              <a:t>For video projects: confirm by Sprint 3 that they have a clear shot list, not just a script.</a:t>
+            </a:r>
+            <a:endParaRPr lang="en-US" sz="1200" dirty="0"/>
+          </a:p>
+          <a:p>
+            <a:pPr algn="l" marL="342900" indent="-342900">
+              <a:lnSpc>
+                <a:spcPts val="1620"/>
+              </a:lnSpc>
+              <a:spcAft>
+                <a:spcPts val="300"/>
+              </a:spcAft>
+              <a:buSzPct val="100000"/>
+              <a:buChar char="•"/>
+            </a:pPr>
+            <a:r>
+              <a:rPr lang="en-US" sz="1200" dirty="0">
+                <a:solidFill>
+                  <a:srgbClr val="1C2833"/>
+                </a:solidFill>
+                <a:latin typeface="Arial" pitchFamily="34" charset="0"/>
+                <a:ea typeface="Arial" pitchFamily="34" charset="-122"/>
+                <a:cs typeface="Arial" pitchFamily="34" charset="-120"/>
+              </a:rPr>
+              <a:t>For data projects: confirm by Sprint 3 that they have at least 3 real data points.</a:t>
+            </a:r>
+            <a:endParaRPr lang="en-US" sz="1200" dirty="0"/>
+          </a:p>
+        </p:txBody>
+      </p:sp>
+      <p:sp>
+        <p:nvSpPr>
+          <p:cNvPr id="6" name="Text 4"/>
           <p:cNvSpPr/>
           <p:nvPr/>
         </p:nvSpPr>
@@ -4878,7 +6107,7 @@
                 <a:ea typeface="Georgia" pitchFamily="34" charset="-122"/>
                 <a:cs typeface="Georgia" pitchFamily="34" charset="-120"/>
               </a:rPr>
-              <a:t>Differentiation</a:t>
+              <a:t>Wrap-up (5 min)</a:t>
             </a:r>
             <a:endParaRPr lang="en-US" sz="1800" dirty="0"/>
           </a:p>
@@ -4893,7 +6122,7 @@
         <p:spPr>
           <a:xfrm>
             <a:off x="634901" y="883593"/>
-            <a:ext cx="8102798" cy="731341"/>
+            <a:ext cx="8102798" cy="769441"/>
           </a:xfrm>
           <a:prstGeom prst="rect">
             <a:avLst/>
@@ -4916,7 +6145,7 @@
               <a:buChar char="•"/>
             </a:pPr>
             <a:r>
-              <a:rPr lang="en-US" sz="1200" b="1" dirty="0">
+              <a:rPr lang="en-US" sz="1200" dirty="0">
                 <a:solidFill>
                   <a:srgbClr val="1C2833"/>
                 </a:solidFill>
@@ -4924,16 +6153,20 @@
                 <a:ea typeface="Arial" pitchFamily="34" charset="-122"/>
                 <a:cs typeface="Arial" pitchFamily="34" charset="-120"/>
               </a:rPr>
-              <a:t>Tier up:</a:t>
-            </a:r>
-            <a:pPr algn="l" indent="0" marL="0">
+              <a:t>30-sec share-out from 4 pairs (you call them).</a:t>
+            </a:r>
+            <a:endParaRPr lang="en-US" sz="1200" dirty="0"/>
+          </a:p>
+          <a:p>
+            <a:pPr algn="l" marL="342900" indent="-342900">
               <a:lnSpc>
                 <a:spcPts val="1620"/>
               </a:lnSpc>
               <a:spcAft>
                 <a:spcPts val="300"/>
               </a:spcAft>
-              <a:buNone/>
+              <a:buSzPct val="100000"/>
+              <a:buChar char="•"/>
             </a:pPr>
             <a:r>
               <a:rPr lang="en-US" sz="1200" dirty="0">
@@ -4944,7 +6177,7 @@
                 <a:ea typeface="Arial" pitchFamily="34" charset="-122"/>
                 <a:cs typeface="Arial" pitchFamily="34" charset="-120"/>
               </a:rPr>
-              <a:t> Stretch goal — add a comparison element. (E.g. video: include a side-by-side speed comparison; workbook: include 5 standard-algorithm problems for contrast; data: also test mental "near-base" additions.)</a:t>
+              <a:t>Plan paragraph submitted at the door.</a:t>
             </a:r>
             <a:endParaRPr lang="en-US" sz="1200" dirty="0"/>
           </a:p>
@@ -4960,7 +6193,7 @@
               <a:buChar char="•"/>
             </a:pPr>
             <a:r>
-              <a:rPr lang="en-US" sz="1200" b="1" dirty="0">
+              <a:rPr lang="en-US" sz="1200" dirty="0">
                 <a:solidFill>
                   <a:srgbClr val="1C2833"/>
                 </a:solidFill>
@@ -4968,27 +6201,7 @@
                 <a:ea typeface="Arial" pitchFamily="34" charset="-122"/>
                 <a:cs typeface="Arial" pitchFamily="34" charset="-120"/>
               </a:rPr>
-              <a:t>Tier down:</a:t>
-            </a:r>
-            <a:pPr algn="l" indent="0" marL="0">
-              <a:lnSpc>
-                <a:spcPts val="1620"/>
-              </a:lnSpc>
-              <a:spcAft>
-                <a:spcPts val="300"/>
-              </a:spcAft>
-              <a:buNone/>
-            </a:pPr>
-            <a:r>
-              <a:rPr lang="en-US" sz="1200" dirty="0">
-                <a:solidFill>
-                  <a:srgbClr val="1C2833"/>
-                </a:solidFill>
-                <a:latin typeface="Arial" pitchFamily="34" charset="0"/>
-                <a:ea typeface="Arial" pitchFamily="34" charset="-122"/>
-                <a:cs typeface="Arial" pitchFamily="34" charset="-120"/>
-              </a:rPr>
-              <a:t> Allow simpler format mid-stream. A clean workbook beats a half-built video.</a:t>
+              <a:t>Preview Day 9: refine and rehearse.</a:t>
             </a:r>
             <a:endParaRPr lang="en-US" sz="1200" dirty="0"/>
           </a:p>
